--- a/assets/docs/Tema3_Geometria_trigonometria_y_patrones.pptx
+++ b/assets/docs/Tema3_Geometria_trigonometria_y_patrones.pptx
@@ -20,9 +20,17 @@
     <p:sldId id="268" r:id="rId14"/>
     <p:sldId id="269" r:id="rId15"/>
     <p:sldId id="270" r:id="rId16"/>
+    <p:sldId id="271" r:id="rId17"/>
+    <p:sldId id="272" r:id="rId18"/>
+    <p:sldId id="273" r:id="rId19"/>
+    <p:sldId id="274" r:id="rId20"/>
+    <p:sldId id="275" r:id="rId21"/>
+    <p:sldId id="276" r:id="rId22"/>
+    <p:sldId id="277" r:id="rId23"/>
+    <p:sldId id="278" r:id="rId24"/>
   </p:sldIdLst>
   <p:notesMasterIdLst>
-    <p:notesMasterId r:id="rId17"/>
+    <p:notesMasterId r:id="rId25"/>
   </p:notesMasterIdLst>
   <p:sldSz cx="9144000" cy="5143500"/>
   <p:notesSz cx="5143500" cy="9144000"/>
@@ -1086,6 +1094,358 @@
 </p:notes>
 </file>
 
+<file path=ppt/notesSlides/notesSlide16.xml><?xml version="1.0" encoding="utf-8"?>
+<p:notes xmlns:a="http://schemas.openxmlformats.org/drawingml/2006/main" xmlns:r="http://schemas.openxmlformats.org/officeDocument/2006/relationships" xmlns:p="http://schemas.openxmlformats.org/presentationml/2006/main">
+  <p:cSld>
+    <p:spTree>
+      <p:nvGrpSpPr>
+        <p:cNvPr id="1" name=""/>
+        <p:cNvGrpSpPr/>
+        <p:nvPr/>
+      </p:nvGrpSpPr>
+      <p:grpSpPr>
+        <a:xfrm>
+          <a:off x="0" y="0"/>
+          <a:ext cx="0" cy="0"/>
+          <a:chOff x="0" y="0"/>
+          <a:chExt cx="0" cy="0"/>
+        </a:xfrm>
+      </p:grpSpPr>
+      <p:sp>
+        <p:nvSpPr>
+          <p:cNvPr id="2" name="Slide Image Placeholder 1"/>
+          <p:cNvSpPr>
+            <a:spLocks noGrp="1" noRot="1" noChangeAspect="1"/>
+          </p:cNvSpPr>
+          <p:nvPr>
+            <p:ph type="sldImg"/>
+          </p:nvPr>
+        </p:nvSpPr>
+        <p:spPr/>
+      </p:sp>
+      <p:sp>
+        <p:nvSpPr>
+          <p:cNvPr id="3" name="Notes Placeholder 2"/>
+          <p:cNvSpPr>
+            <a:spLocks noGrp="1"/>
+          </p:cNvSpPr>
+          <p:nvPr>
+            <p:ph type="body" idx="1"/>
+          </p:nvPr>
+        </p:nvSpPr>
+        <p:spPr/>
+        <p:txBody>
+          <a:bodyPr/>
+          <a:lstStyle/>
+          <a:p>
+            <a:r>
+              <a:rPr lang="en-US" dirty="0"/>
+              <a:t/>
+            </a:r>
+            <a:endParaRPr lang="en-US" dirty="0"/>
+          </a:p>
+        </p:txBody>
+      </p:sp>
+      <p:sp>
+        <p:nvSpPr>
+          <p:cNvPr id="4" name="Slide Number Placeholder 3"/>
+          <p:cNvSpPr>
+            <a:spLocks noGrp="1"/>
+          </p:cNvSpPr>
+          <p:nvPr>
+            <p:ph type="sldNum" sz="quarter" idx="10"/>
+          </p:nvPr>
+        </p:nvSpPr>
+        <p:spPr/>
+        <p:txBody>
+          <a:bodyPr/>
+          <a:lstStyle/>
+          <a:p>
+            <a:fld id="{F7021451-1387-4CA6-816F-3879F97B5CBC}" type="slidenum">
+              <a:rPr lang="en-US"/>
+              <a:t>16</a:t>
+            </a:fld>
+            <a:endParaRPr lang="en-US"/>
+          </a:p>
+        </p:txBody>
+      </p:sp>
+    </p:spTree>
+    <p:extLst>
+      <p:ext uri="{BB962C8B-B14F-4D97-AF65-F5344CB8AC3E}">
+        <p14:creationId xmlns:p14="http://schemas.microsoft.com/office/powerpoint/2010/main" val="1024086991"/>
+      </p:ext>
+    </p:extLst>
+  </p:cSld>
+  <p:clrMapOvr>
+    <a:masterClrMapping/>
+  </p:clrMapOvr>
+</p:notes>
+</file>
+
+<file path=ppt/notesSlides/notesSlide17.xml><?xml version="1.0" encoding="utf-8"?>
+<p:notes xmlns:a="http://schemas.openxmlformats.org/drawingml/2006/main" xmlns:r="http://schemas.openxmlformats.org/officeDocument/2006/relationships" xmlns:p="http://schemas.openxmlformats.org/presentationml/2006/main">
+  <p:cSld>
+    <p:spTree>
+      <p:nvGrpSpPr>
+        <p:cNvPr id="1" name=""/>
+        <p:cNvGrpSpPr/>
+        <p:nvPr/>
+      </p:nvGrpSpPr>
+      <p:grpSpPr>
+        <a:xfrm>
+          <a:off x="0" y="0"/>
+          <a:ext cx="0" cy="0"/>
+          <a:chOff x="0" y="0"/>
+          <a:chExt cx="0" cy="0"/>
+        </a:xfrm>
+      </p:grpSpPr>
+      <p:sp>
+        <p:nvSpPr>
+          <p:cNvPr id="2" name="Slide Image Placeholder 1"/>
+          <p:cNvSpPr>
+            <a:spLocks noGrp="1" noRot="1" noChangeAspect="1"/>
+          </p:cNvSpPr>
+          <p:nvPr>
+            <p:ph type="sldImg"/>
+          </p:nvPr>
+        </p:nvSpPr>
+        <p:spPr/>
+      </p:sp>
+      <p:sp>
+        <p:nvSpPr>
+          <p:cNvPr id="3" name="Notes Placeholder 2"/>
+          <p:cNvSpPr>
+            <a:spLocks noGrp="1"/>
+          </p:cNvSpPr>
+          <p:nvPr>
+            <p:ph type="body" idx="1"/>
+          </p:nvPr>
+        </p:nvSpPr>
+        <p:spPr/>
+        <p:txBody>
+          <a:bodyPr/>
+          <a:lstStyle/>
+          <a:p>
+            <a:r>
+              <a:rPr lang="en-US" dirty="0"/>
+              <a:t/>
+            </a:r>
+            <a:endParaRPr lang="en-US" dirty="0"/>
+          </a:p>
+        </p:txBody>
+      </p:sp>
+      <p:sp>
+        <p:nvSpPr>
+          <p:cNvPr id="4" name="Slide Number Placeholder 3"/>
+          <p:cNvSpPr>
+            <a:spLocks noGrp="1"/>
+          </p:cNvSpPr>
+          <p:nvPr>
+            <p:ph type="sldNum" sz="quarter" idx="10"/>
+          </p:nvPr>
+        </p:nvSpPr>
+        <p:spPr/>
+        <p:txBody>
+          <a:bodyPr/>
+          <a:lstStyle/>
+          <a:p>
+            <a:fld id="{F7021451-1387-4CA6-816F-3879F97B5CBC}" type="slidenum">
+              <a:rPr lang="en-US"/>
+              <a:t>17</a:t>
+            </a:fld>
+            <a:endParaRPr lang="en-US"/>
+          </a:p>
+        </p:txBody>
+      </p:sp>
+    </p:spTree>
+    <p:extLst>
+      <p:ext uri="{BB962C8B-B14F-4D97-AF65-F5344CB8AC3E}">
+        <p14:creationId xmlns:p14="http://schemas.microsoft.com/office/powerpoint/2010/main" val="1024086991"/>
+      </p:ext>
+    </p:extLst>
+  </p:cSld>
+  <p:clrMapOvr>
+    <a:masterClrMapping/>
+  </p:clrMapOvr>
+</p:notes>
+</file>
+
+<file path=ppt/notesSlides/notesSlide18.xml><?xml version="1.0" encoding="utf-8"?>
+<p:notes xmlns:a="http://schemas.openxmlformats.org/drawingml/2006/main" xmlns:r="http://schemas.openxmlformats.org/officeDocument/2006/relationships" xmlns:p="http://schemas.openxmlformats.org/presentationml/2006/main">
+  <p:cSld>
+    <p:spTree>
+      <p:nvGrpSpPr>
+        <p:cNvPr id="1" name=""/>
+        <p:cNvGrpSpPr/>
+        <p:nvPr/>
+      </p:nvGrpSpPr>
+      <p:grpSpPr>
+        <a:xfrm>
+          <a:off x="0" y="0"/>
+          <a:ext cx="0" cy="0"/>
+          <a:chOff x="0" y="0"/>
+          <a:chExt cx="0" cy="0"/>
+        </a:xfrm>
+      </p:grpSpPr>
+      <p:sp>
+        <p:nvSpPr>
+          <p:cNvPr id="2" name="Slide Image Placeholder 1"/>
+          <p:cNvSpPr>
+            <a:spLocks noGrp="1" noRot="1" noChangeAspect="1"/>
+          </p:cNvSpPr>
+          <p:nvPr>
+            <p:ph type="sldImg"/>
+          </p:nvPr>
+        </p:nvSpPr>
+        <p:spPr/>
+      </p:sp>
+      <p:sp>
+        <p:nvSpPr>
+          <p:cNvPr id="3" name="Notes Placeholder 2"/>
+          <p:cNvSpPr>
+            <a:spLocks noGrp="1"/>
+          </p:cNvSpPr>
+          <p:nvPr>
+            <p:ph type="body" idx="1"/>
+          </p:nvPr>
+        </p:nvSpPr>
+        <p:spPr/>
+        <p:txBody>
+          <a:bodyPr/>
+          <a:lstStyle/>
+          <a:p>
+            <a:r>
+              <a:rPr lang="en-US" dirty="0"/>
+              <a:t/>
+            </a:r>
+            <a:endParaRPr lang="en-US" dirty="0"/>
+          </a:p>
+        </p:txBody>
+      </p:sp>
+      <p:sp>
+        <p:nvSpPr>
+          <p:cNvPr id="4" name="Slide Number Placeholder 3"/>
+          <p:cNvSpPr>
+            <a:spLocks noGrp="1"/>
+          </p:cNvSpPr>
+          <p:nvPr>
+            <p:ph type="sldNum" sz="quarter" idx="10"/>
+          </p:nvPr>
+        </p:nvSpPr>
+        <p:spPr/>
+        <p:txBody>
+          <a:bodyPr/>
+          <a:lstStyle/>
+          <a:p>
+            <a:fld id="{F7021451-1387-4CA6-816F-3879F97B5CBC}" type="slidenum">
+              <a:rPr lang="en-US"/>
+              <a:t>18</a:t>
+            </a:fld>
+            <a:endParaRPr lang="en-US"/>
+          </a:p>
+        </p:txBody>
+      </p:sp>
+    </p:spTree>
+    <p:extLst>
+      <p:ext uri="{BB962C8B-B14F-4D97-AF65-F5344CB8AC3E}">
+        <p14:creationId xmlns:p14="http://schemas.microsoft.com/office/powerpoint/2010/main" val="1024086991"/>
+      </p:ext>
+    </p:extLst>
+  </p:cSld>
+  <p:clrMapOvr>
+    <a:masterClrMapping/>
+  </p:clrMapOvr>
+</p:notes>
+</file>
+
+<file path=ppt/notesSlides/notesSlide19.xml><?xml version="1.0" encoding="utf-8"?>
+<p:notes xmlns:a="http://schemas.openxmlformats.org/drawingml/2006/main" xmlns:r="http://schemas.openxmlformats.org/officeDocument/2006/relationships" xmlns:p="http://schemas.openxmlformats.org/presentationml/2006/main">
+  <p:cSld>
+    <p:spTree>
+      <p:nvGrpSpPr>
+        <p:cNvPr id="1" name=""/>
+        <p:cNvGrpSpPr/>
+        <p:nvPr/>
+      </p:nvGrpSpPr>
+      <p:grpSpPr>
+        <a:xfrm>
+          <a:off x="0" y="0"/>
+          <a:ext cx="0" cy="0"/>
+          <a:chOff x="0" y="0"/>
+          <a:chExt cx="0" cy="0"/>
+        </a:xfrm>
+      </p:grpSpPr>
+      <p:sp>
+        <p:nvSpPr>
+          <p:cNvPr id="2" name="Slide Image Placeholder 1"/>
+          <p:cNvSpPr>
+            <a:spLocks noGrp="1" noRot="1" noChangeAspect="1"/>
+          </p:cNvSpPr>
+          <p:nvPr>
+            <p:ph type="sldImg"/>
+          </p:nvPr>
+        </p:nvSpPr>
+        <p:spPr/>
+      </p:sp>
+      <p:sp>
+        <p:nvSpPr>
+          <p:cNvPr id="3" name="Notes Placeholder 2"/>
+          <p:cNvSpPr>
+            <a:spLocks noGrp="1"/>
+          </p:cNvSpPr>
+          <p:nvPr>
+            <p:ph type="body" idx="1"/>
+          </p:nvPr>
+        </p:nvSpPr>
+        <p:spPr/>
+        <p:txBody>
+          <a:bodyPr/>
+          <a:lstStyle/>
+          <a:p>
+            <a:r>
+              <a:rPr lang="en-US" dirty="0"/>
+              <a:t/>
+            </a:r>
+            <a:endParaRPr lang="en-US" dirty="0"/>
+          </a:p>
+        </p:txBody>
+      </p:sp>
+      <p:sp>
+        <p:nvSpPr>
+          <p:cNvPr id="4" name="Slide Number Placeholder 3"/>
+          <p:cNvSpPr>
+            <a:spLocks noGrp="1"/>
+          </p:cNvSpPr>
+          <p:nvPr>
+            <p:ph type="sldNum" sz="quarter" idx="10"/>
+          </p:nvPr>
+        </p:nvSpPr>
+        <p:spPr/>
+        <p:txBody>
+          <a:bodyPr/>
+          <a:lstStyle/>
+          <a:p>
+            <a:fld id="{F7021451-1387-4CA6-816F-3879F97B5CBC}" type="slidenum">
+              <a:rPr lang="en-US"/>
+              <a:t>19</a:t>
+            </a:fld>
+            <a:endParaRPr lang="en-US"/>
+          </a:p>
+        </p:txBody>
+      </p:sp>
+    </p:spTree>
+    <p:extLst>
+      <p:ext uri="{BB962C8B-B14F-4D97-AF65-F5344CB8AC3E}">
+        <p14:creationId xmlns:p14="http://schemas.microsoft.com/office/powerpoint/2010/main" val="1024086991"/>
+      </p:ext>
+    </p:extLst>
+  </p:cSld>
+  <p:clrMapOvr>
+    <a:masterClrMapping/>
+  </p:clrMapOvr>
+</p:notes>
+</file>
+
 <file path=ppt/notesSlides/notesSlide2.xml><?xml version="1.0" encoding="utf-8"?>
 <p:notes xmlns:a="http://schemas.openxmlformats.org/drawingml/2006/main" xmlns:r="http://schemas.openxmlformats.org/officeDocument/2006/relationships" xmlns:p="http://schemas.openxmlformats.org/presentationml/2006/main">
   <p:cSld>
@@ -1156,6 +1516,358 @@
             <a:fld id="{F7021451-1387-4CA6-816F-3879F97B5CBC}" type="slidenum">
               <a:rPr lang="en-US"/>
               <a:t>2</a:t>
+            </a:fld>
+            <a:endParaRPr lang="en-US"/>
+          </a:p>
+        </p:txBody>
+      </p:sp>
+    </p:spTree>
+    <p:extLst>
+      <p:ext uri="{BB962C8B-B14F-4D97-AF65-F5344CB8AC3E}">
+        <p14:creationId xmlns:p14="http://schemas.microsoft.com/office/powerpoint/2010/main" val="1024086991"/>
+      </p:ext>
+    </p:extLst>
+  </p:cSld>
+  <p:clrMapOvr>
+    <a:masterClrMapping/>
+  </p:clrMapOvr>
+</p:notes>
+</file>
+
+<file path=ppt/notesSlides/notesSlide20.xml><?xml version="1.0" encoding="utf-8"?>
+<p:notes xmlns:a="http://schemas.openxmlformats.org/drawingml/2006/main" xmlns:r="http://schemas.openxmlformats.org/officeDocument/2006/relationships" xmlns:p="http://schemas.openxmlformats.org/presentationml/2006/main">
+  <p:cSld>
+    <p:spTree>
+      <p:nvGrpSpPr>
+        <p:cNvPr id="1" name=""/>
+        <p:cNvGrpSpPr/>
+        <p:nvPr/>
+      </p:nvGrpSpPr>
+      <p:grpSpPr>
+        <a:xfrm>
+          <a:off x="0" y="0"/>
+          <a:ext cx="0" cy="0"/>
+          <a:chOff x="0" y="0"/>
+          <a:chExt cx="0" cy="0"/>
+        </a:xfrm>
+      </p:grpSpPr>
+      <p:sp>
+        <p:nvSpPr>
+          <p:cNvPr id="2" name="Slide Image Placeholder 1"/>
+          <p:cNvSpPr>
+            <a:spLocks noGrp="1" noRot="1" noChangeAspect="1"/>
+          </p:cNvSpPr>
+          <p:nvPr>
+            <p:ph type="sldImg"/>
+          </p:nvPr>
+        </p:nvSpPr>
+        <p:spPr/>
+      </p:sp>
+      <p:sp>
+        <p:nvSpPr>
+          <p:cNvPr id="3" name="Notes Placeholder 2"/>
+          <p:cNvSpPr>
+            <a:spLocks noGrp="1"/>
+          </p:cNvSpPr>
+          <p:nvPr>
+            <p:ph type="body" idx="1"/>
+          </p:nvPr>
+        </p:nvSpPr>
+        <p:spPr/>
+        <p:txBody>
+          <a:bodyPr/>
+          <a:lstStyle/>
+          <a:p>
+            <a:r>
+              <a:rPr lang="en-US" dirty="0"/>
+              <a:t/>
+            </a:r>
+            <a:endParaRPr lang="en-US" dirty="0"/>
+          </a:p>
+        </p:txBody>
+      </p:sp>
+      <p:sp>
+        <p:nvSpPr>
+          <p:cNvPr id="4" name="Slide Number Placeholder 3"/>
+          <p:cNvSpPr>
+            <a:spLocks noGrp="1"/>
+          </p:cNvSpPr>
+          <p:nvPr>
+            <p:ph type="sldNum" sz="quarter" idx="10"/>
+          </p:nvPr>
+        </p:nvSpPr>
+        <p:spPr/>
+        <p:txBody>
+          <a:bodyPr/>
+          <a:lstStyle/>
+          <a:p>
+            <a:fld id="{F7021451-1387-4CA6-816F-3879F97B5CBC}" type="slidenum">
+              <a:rPr lang="en-US"/>
+              <a:t>20</a:t>
+            </a:fld>
+            <a:endParaRPr lang="en-US"/>
+          </a:p>
+        </p:txBody>
+      </p:sp>
+    </p:spTree>
+    <p:extLst>
+      <p:ext uri="{BB962C8B-B14F-4D97-AF65-F5344CB8AC3E}">
+        <p14:creationId xmlns:p14="http://schemas.microsoft.com/office/powerpoint/2010/main" val="1024086991"/>
+      </p:ext>
+    </p:extLst>
+  </p:cSld>
+  <p:clrMapOvr>
+    <a:masterClrMapping/>
+  </p:clrMapOvr>
+</p:notes>
+</file>
+
+<file path=ppt/notesSlides/notesSlide21.xml><?xml version="1.0" encoding="utf-8"?>
+<p:notes xmlns:a="http://schemas.openxmlformats.org/drawingml/2006/main" xmlns:r="http://schemas.openxmlformats.org/officeDocument/2006/relationships" xmlns:p="http://schemas.openxmlformats.org/presentationml/2006/main">
+  <p:cSld>
+    <p:spTree>
+      <p:nvGrpSpPr>
+        <p:cNvPr id="1" name=""/>
+        <p:cNvGrpSpPr/>
+        <p:nvPr/>
+      </p:nvGrpSpPr>
+      <p:grpSpPr>
+        <a:xfrm>
+          <a:off x="0" y="0"/>
+          <a:ext cx="0" cy="0"/>
+          <a:chOff x="0" y="0"/>
+          <a:chExt cx="0" cy="0"/>
+        </a:xfrm>
+      </p:grpSpPr>
+      <p:sp>
+        <p:nvSpPr>
+          <p:cNvPr id="2" name="Slide Image Placeholder 1"/>
+          <p:cNvSpPr>
+            <a:spLocks noGrp="1" noRot="1" noChangeAspect="1"/>
+          </p:cNvSpPr>
+          <p:nvPr>
+            <p:ph type="sldImg"/>
+          </p:nvPr>
+        </p:nvSpPr>
+        <p:spPr/>
+      </p:sp>
+      <p:sp>
+        <p:nvSpPr>
+          <p:cNvPr id="3" name="Notes Placeholder 2"/>
+          <p:cNvSpPr>
+            <a:spLocks noGrp="1"/>
+          </p:cNvSpPr>
+          <p:nvPr>
+            <p:ph type="body" idx="1"/>
+          </p:nvPr>
+        </p:nvSpPr>
+        <p:spPr/>
+        <p:txBody>
+          <a:bodyPr/>
+          <a:lstStyle/>
+          <a:p>
+            <a:r>
+              <a:rPr lang="en-US" dirty="0"/>
+              <a:t/>
+            </a:r>
+            <a:endParaRPr lang="en-US" dirty="0"/>
+          </a:p>
+        </p:txBody>
+      </p:sp>
+      <p:sp>
+        <p:nvSpPr>
+          <p:cNvPr id="4" name="Slide Number Placeholder 3"/>
+          <p:cNvSpPr>
+            <a:spLocks noGrp="1"/>
+          </p:cNvSpPr>
+          <p:nvPr>
+            <p:ph type="sldNum" sz="quarter" idx="10"/>
+          </p:nvPr>
+        </p:nvSpPr>
+        <p:spPr/>
+        <p:txBody>
+          <a:bodyPr/>
+          <a:lstStyle/>
+          <a:p>
+            <a:fld id="{F7021451-1387-4CA6-816F-3879F97B5CBC}" type="slidenum">
+              <a:rPr lang="en-US"/>
+              <a:t>21</a:t>
+            </a:fld>
+            <a:endParaRPr lang="en-US"/>
+          </a:p>
+        </p:txBody>
+      </p:sp>
+    </p:spTree>
+    <p:extLst>
+      <p:ext uri="{BB962C8B-B14F-4D97-AF65-F5344CB8AC3E}">
+        <p14:creationId xmlns:p14="http://schemas.microsoft.com/office/powerpoint/2010/main" val="1024086991"/>
+      </p:ext>
+    </p:extLst>
+  </p:cSld>
+  <p:clrMapOvr>
+    <a:masterClrMapping/>
+  </p:clrMapOvr>
+</p:notes>
+</file>
+
+<file path=ppt/notesSlides/notesSlide22.xml><?xml version="1.0" encoding="utf-8"?>
+<p:notes xmlns:a="http://schemas.openxmlformats.org/drawingml/2006/main" xmlns:r="http://schemas.openxmlformats.org/officeDocument/2006/relationships" xmlns:p="http://schemas.openxmlformats.org/presentationml/2006/main">
+  <p:cSld>
+    <p:spTree>
+      <p:nvGrpSpPr>
+        <p:cNvPr id="1" name=""/>
+        <p:cNvGrpSpPr/>
+        <p:nvPr/>
+      </p:nvGrpSpPr>
+      <p:grpSpPr>
+        <a:xfrm>
+          <a:off x="0" y="0"/>
+          <a:ext cx="0" cy="0"/>
+          <a:chOff x="0" y="0"/>
+          <a:chExt cx="0" cy="0"/>
+        </a:xfrm>
+      </p:grpSpPr>
+      <p:sp>
+        <p:nvSpPr>
+          <p:cNvPr id="2" name="Slide Image Placeholder 1"/>
+          <p:cNvSpPr>
+            <a:spLocks noGrp="1" noRot="1" noChangeAspect="1"/>
+          </p:cNvSpPr>
+          <p:nvPr>
+            <p:ph type="sldImg"/>
+          </p:nvPr>
+        </p:nvSpPr>
+        <p:spPr/>
+      </p:sp>
+      <p:sp>
+        <p:nvSpPr>
+          <p:cNvPr id="3" name="Notes Placeholder 2"/>
+          <p:cNvSpPr>
+            <a:spLocks noGrp="1"/>
+          </p:cNvSpPr>
+          <p:nvPr>
+            <p:ph type="body" idx="1"/>
+          </p:nvPr>
+        </p:nvSpPr>
+        <p:spPr/>
+        <p:txBody>
+          <a:bodyPr/>
+          <a:lstStyle/>
+          <a:p>
+            <a:r>
+              <a:rPr lang="en-US" dirty="0"/>
+              <a:t/>
+            </a:r>
+            <a:endParaRPr lang="en-US" dirty="0"/>
+          </a:p>
+        </p:txBody>
+      </p:sp>
+      <p:sp>
+        <p:nvSpPr>
+          <p:cNvPr id="4" name="Slide Number Placeholder 3"/>
+          <p:cNvSpPr>
+            <a:spLocks noGrp="1"/>
+          </p:cNvSpPr>
+          <p:nvPr>
+            <p:ph type="sldNum" sz="quarter" idx="10"/>
+          </p:nvPr>
+        </p:nvSpPr>
+        <p:spPr/>
+        <p:txBody>
+          <a:bodyPr/>
+          <a:lstStyle/>
+          <a:p>
+            <a:fld id="{F7021451-1387-4CA6-816F-3879F97B5CBC}" type="slidenum">
+              <a:rPr lang="en-US"/>
+              <a:t>22</a:t>
+            </a:fld>
+            <a:endParaRPr lang="en-US"/>
+          </a:p>
+        </p:txBody>
+      </p:sp>
+    </p:spTree>
+    <p:extLst>
+      <p:ext uri="{BB962C8B-B14F-4D97-AF65-F5344CB8AC3E}">
+        <p14:creationId xmlns:p14="http://schemas.microsoft.com/office/powerpoint/2010/main" val="1024086991"/>
+      </p:ext>
+    </p:extLst>
+  </p:cSld>
+  <p:clrMapOvr>
+    <a:masterClrMapping/>
+  </p:clrMapOvr>
+</p:notes>
+</file>
+
+<file path=ppt/notesSlides/notesSlide23.xml><?xml version="1.0" encoding="utf-8"?>
+<p:notes xmlns:a="http://schemas.openxmlformats.org/drawingml/2006/main" xmlns:r="http://schemas.openxmlformats.org/officeDocument/2006/relationships" xmlns:p="http://schemas.openxmlformats.org/presentationml/2006/main">
+  <p:cSld>
+    <p:spTree>
+      <p:nvGrpSpPr>
+        <p:cNvPr id="1" name=""/>
+        <p:cNvGrpSpPr/>
+        <p:nvPr/>
+      </p:nvGrpSpPr>
+      <p:grpSpPr>
+        <a:xfrm>
+          <a:off x="0" y="0"/>
+          <a:ext cx="0" cy="0"/>
+          <a:chOff x="0" y="0"/>
+          <a:chExt cx="0" cy="0"/>
+        </a:xfrm>
+      </p:grpSpPr>
+      <p:sp>
+        <p:nvSpPr>
+          <p:cNvPr id="2" name="Slide Image Placeholder 1"/>
+          <p:cNvSpPr>
+            <a:spLocks noGrp="1" noRot="1" noChangeAspect="1"/>
+          </p:cNvSpPr>
+          <p:nvPr>
+            <p:ph type="sldImg"/>
+          </p:nvPr>
+        </p:nvSpPr>
+        <p:spPr/>
+      </p:sp>
+      <p:sp>
+        <p:nvSpPr>
+          <p:cNvPr id="3" name="Notes Placeholder 2"/>
+          <p:cNvSpPr>
+            <a:spLocks noGrp="1"/>
+          </p:cNvSpPr>
+          <p:nvPr>
+            <p:ph type="body" idx="1"/>
+          </p:nvPr>
+        </p:nvSpPr>
+        <p:spPr/>
+        <p:txBody>
+          <a:bodyPr/>
+          <a:lstStyle/>
+          <a:p>
+            <a:r>
+              <a:rPr lang="en-US" dirty="0"/>
+              <a:t/>
+            </a:r>
+            <a:endParaRPr lang="en-US" dirty="0"/>
+          </a:p>
+        </p:txBody>
+      </p:sp>
+      <p:sp>
+        <p:nvSpPr>
+          <p:cNvPr id="4" name="Slide Number Placeholder 3"/>
+          <p:cNvSpPr>
+            <a:spLocks noGrp="1"/>
+          </p:cNvSpPr>
+          <p:nvPr>
+            <p:ph type="sldNum" sz="quarter" idx="10"/>
+          </p:nvPr>
+        </p:nvSpPr>
+        <p:spPr/>
+        <p:txBody>
+          <a:bodyPr/>
+          <a:lstStyle/>
+          <a:p>
+            <a:fld id="{F7021451-1387-4CA6-816F-3879F97B5CBC}" type="slidenum">
+              <a:rPr lang="en-US"/>
+              <a:t>23</a:t>
             </a:fld>
             <a:endParaRPr lang="en-US"/>
           </a:p>
@@ -3780,7 +4492,7 @@
                 <a:ea typeface="Cambria" pitchFamily="34" charset="-122"/>
                 <a:cs typeface="Cambria" pitchFamily="34" charset="-120"/>
               </a:rPr>
-              <a:t>Errores frecuentes</a:t>
+              <a:t>Razón y proporción</a:t>
             </a:r>
             <a:endParaRPr lang="en-US" sz="3000" dirty="0"/>
           </a:p>
@@ -3819,7 +4531,7 @@
                 <a:ea typeface="Calibri" pitchFamily="34" charset="-122"/>
                 <a:cs typeface="Calibri" pitchFamily="34" charset="-120"/>
               </a:rPr>
-              <a:t>Revísalos antes del examen</a:t>
+              <a:t>Comparar magnitudes por su cociente</a:t>
             </a:r>
             <a:endParaRPr lang="en-US" sz="1600" dirty="0"/>
           </a:p>
@@ -3866,14 +4578,80 @@
       </p:sp>
       <p:sp>
         <p:nvSpPr>
-          <p:cNvPr id="5" name="Text 3"/>
+          <p:cNvPr id="5" name="Shape 3"/>
+          <p:cNvSpPr/>
+          <p:nvPr/>
+        </p:nvSpPr>
+        <p:spPr>
+          <a:xfrm>
+            <a:off x="914400" y="1737360"/>
+            <a:ext cx="7132320" cy="1005840"/>
+          </a:xfrm>
+          <a:prstGeom prst="roundRect">
+            <a:avLst>
+              <a:gd name="adj" fmla="val 10909"/>
+            </a:avLst>
+          </a:prstGeom>
+          <a:solidFill>
+            <a:srgbClr val="DDE8F3"/>
+          </a:solidFill>
+          <a:ln w="12700">
+            <a:solidFill>
+              <a:srgbClr val="DDE8F3"/>
+            </a:solidFill>
+            <a:prstDash val="solid"/>
+          </a:ln>
+        </p:spPr>
+      </p:sp>
+      <p:sp>
+        <p:nvSpPr>
+          <p:cNvPr id="6" name="Text 4"/>
           <p:cNvSpPr txBox="1"/>
           <p:nvPr/>
         </p:nvSpPr>
         <p:spPr>
           <a:xfrm>
-            <a:off x="548640" y="1645920"/>
-            <a:ext cx="8046720" cy="2926080"/>
+            <a:off x="914400" y="1737360"/>
+            <a:ext cx="7132320" cy="1005840"/>
+          </a:xfrm>
+          <a:prstGeom prst="rect">
+            <a:avLst/>
+          </a:prstGeom>
+          <a:noFill/>
+          <a:ln/>
+        </p:spPr>
+        <p:txBody>
+          <a:bodyPr wrap="square" lIns="0" tIns="0" rIns="0" bIns="0" rtlCol="0" anchor="ctr"/>
+          <a:lstStyle/>
+          <a:p>
+            <a:pPr algn="ctr" indent="0" marL="0">
+              <a:buNone/>
+            </a:pPr>
+            <a:r>
+              <a:rPr lang="en-US" sz="2200" b="1" dirty="0">
+                <a:solidFill>
+                  <a:srgbClr val="2F3E4E"/>
+                </a:solidFill>
+                <a:latin typeface="Calibri" pitchFamily="34" charset="0"/>
+                <a:ea typeface="Calibri" pitchFamily="34" charset="-122"/>
+                <a:cs typeface="Calibri" pitchFamily="34" charset="-120"/>
+              </a:rPr>
+              <a:t>a/b = c/d   ⇒   a · d = b · c</a:t>
+            </a:r>
+            <a:endParaRPr lang="en-US" sz="2200" dirty="0"/>
+          </a:p>
+        </p:txBody>
+      </p:sp>
+      <p:sp>
+        <p:nvSpPr>
+          <p:cNvPr id="7" name="Text 5"/>
+          <p:cNvSpPr txBox="1"/>
+          <p:nvPr/>
+        </p:nvSpPr>
+        <p:spPr>
+          <a:xfrm>
+            <a:off x="548640" y="3017520"/>
+            <a:ext cx="8046720" cy="1463040"/>
           </a:xfrm>
           <a:prstGeom prst="rect">
             <a:avLst/>
@@ -3901,7 +4679,7 @@
                 <a:ea typeface="Calibri" pitchFamily="34" charset="-122"/>
                 <a:cs typeface="Calibri" pitchFamily="34" charset="-120"/>
               </a:rPr>
-              <a:t>Confundir complementarios (90°) con suplementarios (180°).</a:t>
+              <a:t>Extremos: a y d. Medios: b y c.</a:t>
             </a:r>
             <a:endParaRPr lang="en-US" sz="1700" dirty="0"/>
           </a:p>
@@ -3922,70 +4700,7 @@
                 <a:ea typeface="Calibri" pitchFamily="34" charset="-122"/>
                 <a:cs typeface="Calibri" pitchFamily="34" charset="-120"/>
               </a:rPr>
-              <a:t>Errores de signo en distancias: 3 − (−4) = 7, no −1.</a:t>
-            </a:r>
-            <a:endParaRPr lang="en-US" sz="1700" dirty="0"/>
-          </a:p>
-          <a:p>
-            <a:pPr marL="342900" indent="-342900">
-              <a:spcAft>
-                <a:spcPts val="600"/>
-              </a:spcAft>
-              <a:buSzPct val="100000"/>
-              <a:buChar char="•"/>
-            </a:pPr>
-            <a:r>
-              <a:rPr lang="en-US" sz="1700" dirty="0">
-                <a:solidFill>
-                  <a:srgbClr val="2F3E4E"/>
-                </a:solidFill>
-                <a:latin typeface="Calibri" pitchFamily="34" charset="0"/>
-                <a:ea typeface="Calibri" pitchFamily="34" charset="-122"/>
-                <a:cs typeface="Calibri" pitchFamily="34" charset="-120"/>
-              </a:rPr>
-              <a:t>Calculadora en radianes: revisa que sen(30) dé 0.5.</a:t>
-            </a:r>
-            <a:endParaRPr lang="en-US" sz="1700" dirty="0"/>
-          </a:p>
-          <a:p>
-            <a:pPr marL="342900" indent="-342900">
-              <a:spcAft>
-                <a:spcPts val="600"/>
-              </a:spcAft>
-              <a:buSzPct val="100000"/>
-              <a:buChar char="•"/>
-            </a:pPr>
-            <a:r>
-              <a:rPr lang="en-US" sz="1700" dirty="0">
-                <a:solidFill>
-                  <a:srgbClr val="2F3E4E"/>
-                </a:solidFill>
-                <a:latin typeface="Calibri" pitchFamily="34" charset="0"/>
-                <a:ea typeface="Calibri" pitchFamily="34" charset="-122"/>
-                <a:cs typeface="Calibri" pitchFamily="34" charset="-120"/>
-              </a:rPr>
-              <a:t>Intercambiar el cateto opuesto y el adyacente.</a:t>
-            </a:r>
-            <a:endParaRPr lang="en-US" sz="1700" dirty="0"/>
-          </a:p>
-          <a:p>
-            <a:pPr marL="342900" indent="-342900">
-              <a:spcAft>
-                <a:spcPts val="600"/>
-              </a:spcAft>
-              <a:buSzPct val="100000"/>
-              <a:buChar char="•"/>
-            </a:pPr>
-            <a:r>
-              <a:rPr lang="en-US" sz="1700" dirty="0">
-                <a:solidFill>
-                  <a:srgbClr val="2F3E4E"/>
-                </a:solidFill>
-                <a:latin typeface="Calibri" pitchFamily="34" charset="0"/>
-                <a:ea typeface="Calibri" pitchFamily="34" charset="-122"/>
-                <a:cs typeface="Calibri" pitchFamily="34" charset="-120"/>
-              </a:rPr>
-              <a:t>Confundir n (cantidad de términos) con a_n (último término).</a:t>
+              <a:t>Receta: 3 tazas de harina por cada 2 de agua. Con 6 tazas de agua, x/6 = 3/2, así que x = 9 tazas.</a:t>
             </a:r>
             <a:endParaRPr lang="en-US" sz="1700" dirty="0"/>
           </a:p>
@@ -4056,7 +4771,7 @@
                 <a:ea typeface="Cambria" pitchFamily="34" charset="-122"/>
                 <a:cs typeface="Cambria" pitchFamily="34" charset="-120"/>
               </a:rPr>
-              <a:t>Resumen de la clase</a:t>
+              <a:t>Proporcionalidad directa</a:t>
             </a:r>
             <a:endParaRPr lang="en-US" sz="3000" dirty="0"/>
           </a:p>
@@ -4095,7 +4810,7 @@
                 <a:ea typeface="Calibri" pitchFamily="34" charset="-122"/>
                 <a:cs typeface="Calibri" pitchFamily="34" charset="-120"/>
               </a:rPr>
-              <a:t>Ángulos, Pitágoras, trigonometría y patrones</a:t>
+              <a:t>Multiplicar una magnitud por k multiplica la otra por el mismo k</a:t>
             </a:r>
             <a:endParaRPr lang="en-US" sz="1600" dirty="0"/>
           </a:p>
@@ -4140,9 +4855,3059 @@
           </a:p>
         </p:txBody>
       </p:sp>
+      <p:sp>
+        <p:nvSpPr>
+          <p:cNvPr id="5" name="Shape 3"/>
+          <p:cNvSpPr/>
+          <p:nvPr/>
+        </p:nvSpPr>
+        <p:spPr>
+          <a:xfrm>
+            <a:off x="1645920" y="1737360"/>
+            <a:ext cx="5852160" cy="1005840"/>
+          </a:xfrm>
+          <a:prstGeom prst="roundRect">
+            <a:avLst>
+              <a:gd name="adj" fmla="val 10909"/>
+            </a:avLst>
+          </a:prstGeom>
+          <a:solidFill>
+            <a:srgbClr val="E1F0E7"/>
+          </a:solidFill>
+          <a:ln w="12700">
+            <a:solidFill>
+              <a:srgbClr val="E1F0E7"/>
+            </a:solidFill>
+            <a:prstDash val="solid"/>
+          </a:ln>
+        </p:spPr>
+      </p:sp>
+      <p:sp>
+        <p:nvSpPr>
+          <p:cNvPr id="6" name="Text 4"/>
+          <p:cNvSpPr txBox="1"/>
+          <p:nvPr/>
+        </p:nvSpPr>
+        <p:spPr>
+          <a:xfrm>
+            <a:off x="1645920" y="1737360"/>
+            <a:ext cx="5852160" cy="1005840"/>
+          </a:xfrm>
+          <a:prstGeom prst="rect">
+            <a:avLst/>
+          </a:prstGeom>
+          <a:noFill/>
+          <a:ln/>
+        </p:spPr>
+        <p:txBody>
+          <a:bodyPr wrap="square" lIns="0" tIns="0" rIns="0" bIns="0" rtlCol="0" anchor="ctr"/>
+          <a:lstStyle/>
+          <a:p>
+            <a:pPr algn="ctr" indent="0" marL="0">
+              <a:buNone/>
+            </a:pPr>
+            <a:r>
+              <a:rPr lang="en-US" sz="2600" b="1" dirty="0">
+                <a:solidFill>
+                  <a:srgbClr val="2F3E4E"/>
+                </a:solidFill>
+                <a:latin typeface="Calibri" pitchFamily="34" charset="0"/>
+                <a:ea typeface="Calibri" pitchFamily="34" charset="-122"/>
+                <a:cs typeface="Calibri" pitchFamily="34" charset="-120"/>
+              </a:rPr>
+              <a:t>y = k · x</a:t>
+            </a:r>
+            <a:endParaRPr lang="en-US" sz="2600" dirty="0"/>
+          </a:p>
+        </p:txBody>
+      </p:sp>
+      <p:sp>
+        <p:nvSpPr>
+          <p:cNvPr id="7" name="Text 5"/>
+          <p:cNvSpPr txBox="1"/>
+          <p:nvPr/>
+        </p:nvSpPr>
+        <p:spPr>
+          <a:xfrm>
+            <a:off x="548640" y="3017520"/>
+            <a:ext cx="8046720" cy="1463040"/>
+          </a:xfrm>
+          <a:prstGeom prst="rect">
+            <a:avLst/>
+          </a:prstGeom>
+          <a:noFill/>
+          <a:ln/>
+        </p:spPr>
+        <p:txBody>
+          <a:bodyPr wrap="square" lIns="0" tIns="0" rIns="0" bIns="0" rtlCol="0" anchor="t"/>
+          <a:lstStyle/>
+          <a:p>
+            <a:pPr marL="342900" indent="-342900">
+              <a:spcAft>
+                <a:spcPts val="600"/>
+              </a:spcAft>
+              <a:buSzPct val="100000"/>
+              <a:buChar char="•"/>
+            </a:pPr>
+            <a:r>
+              <a:rPr lang="en-US" sz="1700" dirty="0">
+                <a:solidFill>
+                  <a:srgbClr val="2F3E4E"/>
+                </a:solidFill>
+                <a:latin typeface="Calibri" pitchFamily="34" charset="0"/>
+                <a:ea typeface="Calibri" pitchFamily="34" charset="-122"/>
+                <a:cs typeface="Calibri" pitchFamily="34" charset="-120"/>
+              </a:rPr>
+              <a:t>k = y / x. Si 4 cm³ tienen una masa de 20 g, k = 5 g/cm³.</a:t>
+            </a:r>
+            <a:endParaRPr lang="en-US" sz="1700" dirty="0"/>
+          </a:p>
+          <a:p>
+            <a:pPr marL="342900" indent="-342900">
+              <a:spcAft>
+                <a:spcPts val="600"/>
+              </a:spcAft>
+              <a:buSzPct val="100000"/>
+              <a:buChar char="•"/>
+            </a:pPr>
+            <a:r>
+              <a:rPr lang="en-US" sz="1700" dirty="0">
+                <a:solidFill>
+                  <a:srgbClr val="2F3E4E"/>
+                </a:solidFill>
+                <a:latin typeface="Calibri" pitchFamily="34" charset="0"/>
+                <a:ea typeface="Calibri" pitchFamily="34" charset="-122"/>
+                <a:cs typeface="Calibri" pitchFamily="34" charset="-120"/>
+              </a:rPr>
+              <a:t>Si el volumen se duplica a 8 cm³, la masa es 5 · 8 = 40 g.</a:t>
+            </a:r>
+            <a:endParaRPr lang="en-US" sz="1700" dirty="0"/>
+          </a:p>
+        </p:txBody>
+      </p:sp>
+    </p:spTree>
+  </p:cSld>
+  <p:clrMapOvr>
+    <a:masterClrMapping/>
+  </p:clrMapOvr>
+</p:sld>
+</file>
+
+<file path=ppt/slides/slide16.xml><?xml version="1.0" encoding="utf-8"?>
+<p:sld xmlns:a="http://schemas.openxmlformats.org/drawingml/2006/main" xmlns:r="http://schemas.openxmlformats.org/officeDocument/2006/relationships" xmlns:p="http://schemas.openxmlformats.org/presentationml/2006/main">
+  <p:cSld name="Slide 16">
+    <p:bg>
+      <p:bgPr>
+        <a:solidFill>
+          <a:srgbClr val="FFFFFF"/>
+        </a:solidFill>
+      </p:bgPr>
+    </p:bg>
+    <p:spTree>
+      <p:nvGrpSpPr>
+        <p:cNvPr id="1" name=""/>
+        <p:cNvGrpSpPr/>
+        <p:nvPr/>
+      </p:nvGrpSpPr>
+      <p:grpSpPr>
+        <a:xfrm>
+          <a:off x="0" y="0"/>
+          <a:ext cx="0" cy="0"/>
+          <a:chOff x="0" y="0"/>
+          <a:chExt cx="0" cy="0"/>
+        </a:xfrm>
+      </p:grpSpPr>
+      <p:sp>
+        <p:nvSpPr>
+          <p:cNvPr id="2" name="Text 0"/>
+          <p:cNvSpPr txBox="1"/>
+          <p:nvPr/>
+        </p:nvSpPr>
+        <p:spPr>
+          <a:xfrm>
+            <a:off x="548640" y="320040"/>
+            <a:ext cx="8046720" cy="640080"/>
+          </a:xfrm>
+          <a:prstGeom prst="rect">
+            <a:avLst/>
+          </a:prstGeom>
+          <a:noFill/>
+          <a:ln/>
+        </p:spPr>
+        <p:txBody>
+          <a:bodyPr wrap="square" lIns="0" tIns="0" rIns="0" bIns="0" rtlCol="0" anchor="ctr"/>
+          <a:lstStyle/>
+          <a:p>
+            <a:pPr indent="0" marL="0">
+              <a:buNone/>
+            </a:pPr>
+            <a:r>
+              <a:rPr lang="en-US" sz="3000" b="1" dirty="0">
+                <a:solidFill>
+                  <a:srgbClr val="2F3E4E"/>
+                </a:solidFill>
+                <a:latin typeface="Cambria" pitchFamily="34" charset="0"/>
+                <a:ea typeface="Cambria" pitchFamily="34" charset="-122"/>
+                <a:cs typeface="Cambria" pitchFamily="34" charset="-120"/>
+              </a:rPr>
+              <a:t>Escalas</a:t>
+            </a:r>
+            <a:endParaRPr lang="en-US" sz="3000" dirty="0"/>
+          </a:p>
+        </p:txBody>
+      </p:sp>
+      <p:sp>
+        <p:nvSpPr>
+          <p:cNvPr id="3" name="Text 1"/>
+          <p:cNvSpPr txBox="1"/>
+          <p:nvPr/>
+        </p:nvSpPr>
+        <p:spPr>
+          <a:xfrm>
+            <a:off x="548640" y="960120"/>
+            <a:ext cx="8046720" cy="365760"/>
+          </a:xfrm>
+          <a:prstGeom prst="rect">
+            <a:avLst/>
+          </a:prstGeom>
+          <a:noFill/>
+          <a:ln/>
+        </p:spPr>
+        <p:txBody>
+          <a:bodyPr wrap="square" lIns="0" tIns="0" rIns="0" bIns="0" rtlCol="0" anchor="ctr"/>
+          <a:lstStyle/>
+          <a:p>
+            <a:pPr indent="0" marL="0">
+              <a:buNone/>
+            </a:pPr>
+            <a:r>
+              <a:rPr lang="en-US" sz="1600" dirty="0">
+                <a:solidFill>
+                  <a:srgbClr val="5F6E80"/>
+                </a:solidFill>
+                <a:latin typeface="Calibri" pitchFamily="34" charset="0"/>
+                <a:ea typeface="Calibri" pitchFamily="34" charset="-122"/>
+                <a:cs typeface="Calibri" pitchFamily="34" charset="-120"/>
+              </a:rPr>
+              <a:t>Distancia en el plano entre distancia real</a:t>
+            </a:r>
+            <a:endParaRPr lang="en-US" sz="1600" dirty="0"/>
+          </a:p>
+        </p:txBody>
+      </p:sp>
+      <p:sp>
+        <p:nvSpPr>
+          <p:cNvPr id="4" name="Text 2"/>
+          <p:cNvSpPr txBox="1"/>
+          <p:nvPr/>
+        </p:nvSpPr>
+        <p:spPr>
+          <a:xfrm>
+            <a:off x="548640" y="4754880"/>
+            <a:ext cx="8046720" cy="228600"/>
+          </a:xfrm>
+          <a:prstGeom prst="rect">
+            <a:avLst/>
+          </a:prstGeom>
+          <a:noFill/>
+          <a:ln/>
+        </p:spPr>
+        <p:txBody>
+          <a:bodyPr wrap="square" lIns="0" tIns="0" rIns="0" bIns="0" rtlCol="0" anchor="ctr"/>
+          <a:lstStyle/>
+          <a:p>
+            <a:pPr indent="0" marL="0">
+              <a:buNone/>
+            </a:pPr>
+            <a:r>
+              <a:rPr lang="en-US" sz="1000" dirty="0">
+                <a:solidFill>
+                  <a:srgbClr val="8A98A8"/>
+                </a:solidFill>
+                <a:latin typeface="Calibri" pitchFamily="34" charset="0"/>
+                <a:ea typeface="Calibri" pitchFamily="34" charset="-122"/>
+                <a:cs typeface="Calibri" pitchFamily="34" charset="-120"/>
+              </a:rPr>
+              <a:t>Club de programación Competitiva - BugSquad 2026</a:t>
+            </a:r>
+            <a:endParaRPr lang="en-US" sz="1000" dirty="0"/>
+          </a:p>
+        </p:txBody>
+      </p:sp>
+      <p:sp>
+        <p:nvSpPr>
+          <p:cNvPr id="5" name="Shape 3"/>
+          <p:cNvSpPr/>
+          <p:nvPr/>
+        </p:nvSpPr>
+        <p:spPr>
+          <a:xfrm>
+            <a:off x="1645920" y="1737360"/>
+            <a:ext cx="5852160" cy="1005840"/>
+          </a:xfrm>
+          <a:prstGeom prst="roundRect">
+            <a:avLst>
+              <a:gd name="adj" fmla="val 10909"/>
+            </a:avLst>
+          </a:prstGeom>
+          <a:solidFill>
+            <a:srgbClr val="DDE8F3"/>
+          </a:solidFill>
+          <a:ln w="12700">
+            <a:solidFill>
+              <a:srgbClr val="DDE8F3"/>
+            </a:solidFill>
+            <a:prstDash val="solid"/>
+          </a:ln>
+        </p:spPr>
+      </p:sp>
+      <p:sp>
+        <p:nvSpPr>
+          <p:cNvPr id="6" name="Text 4"/>
+          <p:cNvSpPr txBox="1"/>
+          <p:nvPr/>
+        </p:nvSpPr>
+        <p:spPr>
+          <a:xfrm>
+            <a:off x="1645920" y="1737360"/>
+            <a:ext cx="5852160" cy="1005840"/>
+          </a:xfrm>
+          <a:prstGeom prst="rect">
+            <a:avLst/>
+          </a:prstGeom>
+          <a:noFill/>
+          <a:ln/>
+        </p:spPr>
+        <p:txBody>
+          <a:bodyPr wrap="square" lIns="0" tIns="0" rIns="0" bIns="0" rtlCol="0" anchor="ctr"/>
+          <a:lstStyle/>
+          <a:p>
+            <a:pPr algn="ctr" indent="0" marL="0">
+              <a:buNone/>
+            </a:pPr>
+            <a:r>
+              <a:rPr lang="en-US" sz="2600" b="1" dirty="0">
+                <a:solidFill>
+                  <a:srgbClr val="2F3E4E"/>
+                </a:solidFill>
+                <a:latin typeface="Calibri" pitchFamily="34" charset="0"/>
+                <a:ea typeface="Calibri" pitchFamily="34" charset="-122"/>
+                <a:cs typeface="Calibri" pitchFamily="34" charset="-120"/>
+              </a:rPr>
+              <a:t>Escala 1 : 50 000</a:t>
+            </a:r>
+            <a:endParaRPr lang="en-US" sz="2600" dirty="0"/>
+          </a:p>
+        </p:txBody>
+      </p:sp>
+      <p:sp>
+        <p:nvSpPr>
+          <p:cNvPr id="7" name="Text 5"/>
+          <p:cNvSpPr txBox="1"/>
+          <p:nvPr/>
+        </p:nvSpPr>
+        <p:spPr>
+          <a:xfrm>
+            <a:off x="548640" y="3017520"/>
+            <a:ext cx="8046720" cy="1463040"/>
+          </a:xfrm>
+          <a:prstGeom prst="rect">
+            <a:avLst/>
+          </a:prstGeom>
+          <a:noFill/>
+          <a:ln/>
+        </p:spPr>
+        <p:txBody>
+          <a:bodyPr wrap="square" lIns="0" tIns="0" rIns="0" bIns="0" rtlCol="0" anchor="t"/>
+          <a:lstStyle/>
+          <a:p>
+            <a:pPr marL="342900" indent="-342900">
+              <a:spcAft>
+                <a:spcPts val="600"/>
+              </a:spcAft>
+              <a:buSzPct val="100000"/>
+              <a:buChar char="•"/>
+            </a:pPr>
+            <a:r>
+              <a:rPr lang="en-US" sz="1700" dirty="0">
+                <a:solidFill>
+                  <a:srgbClr val="2F3E4E"/>
+                </a:solidFill>
+                <a:latin typeface="Calibri" pitchFamily="34" charset="0"/>
+                <a:ea typeface="Calibri" pitchFamily="34" charset="-122"/>
+                <a:cs typeface="Calibri" pitchFamily="34" charset="-120"/>
+              </a:rPr>
+              <a:t>Escala = distancia en el plano / distancia real = 1 / E.</a:t>
+            </a:r>
+            <a:endParaRPr lang="en-US" sz="1700" dirty="0"/>
+          </a:p>
+          <a:p>
+            <a:pPr marL="342900" indent="-342900">
+              <a:spcAft>
+                <a:spcPts val="600"/>
+              </a:spcAft>
+              <a:buSzPct val="100000"/>
+              <a:buChar char="•"/>
+            </a:pPr>
+            <a:r>
+              <a:rPr lang="en-US" sz="1700" dirty="0">
+                <a:solidFill>
+                  <a:srgbClr val="2F3E4E"/>
+                </a:solidFill>
+                <a:latin typeface="Calibri" pitchFamily="34" charset="0"/>
+                <a:ea typeface="Calibri" pitchFamily="34" charset="-122"/>
+                <a:cs typeface="Calibri" pitchFamily="34" charset="-120"/>
+              </a:rPr>
+              <a:t>4.5 cm en el mapa: D = 4.5 · 50 000 = 225 000 cm = 2.25 km.</a:t>
+            </a:r>
+            <a:endParaRPr lang="en-US" sz="1700" dirty="0"/>
+          </a:p>
+        </p:txBody>
+      </p:sp>
+    </p:spTree>
+  </p:cSld>
+  <p:clrMapOvr>
+    <a:masterClrMapping/>
+  </p:clrMapOvr>
+</p:sld>
+</file>
+
+<file path=ppt/slides/slide17.xml><?xml version="1.0" encoding="utf-8"?>
+<p:sld xmlns:a="http://schemas.openxmlformats.org/drawingml/2006/main" xmlns:r="http://schemas.openxmlformats.org/officeDocument/2006/relationships" xmlns:p="http://schemas.openxmlformats.org/presentationml/2006/main">
+  <p:cSld name="Slide 17">
+    <p:bg>
+      <p:bgPr>
+        <a:solidFill>
+          <a:srgbClr val="FFFFFF"/>
+        </a:solidFill>
+      </p:bgPr>
+    </p:bg>
+    <p:spTree>
+      <p:nvGrpSpPr>
+        <p:cNvPr id="1" name=""/>
+        <p:cNvGrpSpPr/>
+        <p:nvPr/>
+      </p:nvGrpSpPr>
+      <p:grpSpPr>
+        <a:xfrm>
+          <a:off x="0" y="0"/>
+          <a:ext cx="0" cy="0"/>
+          <a:chOff x="0" y="0"/>
+          <a:chExt cx="0" cy="0"/>
+        </a:xfrm>
+      </p:grpSpPr>
+      <p:sp>
+        <p:nvSpPr>
+          <p:cNvPr id="2" name="Text 0"/>
+          <p:cNvSpPr txBox="1"/>
+          <p:nvPr/>
+        </p:nvSpPr>
+        <p:spPr>
+          <a:xfrm>
+            <a:off x="548640" y="320040"/>
+            <a:ext cx="8046720" cy="640080"/>
+          </a:xfrm>
+          <a:prstGeom prst="rect">
+            <a:avLst/>
+          </a:prstGeom>
+          <a:noFill/>
+          <a:ln/>
+        </p:spPr>
+        <p:txBody>
+          <a:bodyPr wrap="square" lIns="0" tIns="0" rIns="0" bIns="0" rtlCol="0" anchor="ctr"/>
+          <a:lstStyle/>
+          <a:p>
+            <a:pPr indent="0" marL="0">
+              <a:buNone/>
+            </a:pPr>
+            <a:r>
+              <a:rPr lang="en-US" sz="3000" b="1" dirty="0">
+                <a:solidFill>
+                  <a:srgbClr val="2F3E4E"/>
+                </a:solidFill>
+                <a:latin typeface="Cambria" pitchFamily="34" charset="0"/>
+                <a:ea typeface="Cambria" pitchFamily="34" charset="-122"/>
+                <a:cs typeface="Cambria" pitchFamily="34" charset="-120"/>
+              </a:rPr>
+              <a:t>Triángulos semejantes</a:t>
+            </a:r>
+            <a:endParaRPr lang="en-US" sz="3000" dirty="0"/>
+          </a:p>
+        </p:txBody>
+      </p:sp>
+      <p:sp>
+        <p:nvSpPr>
+          <p:cNvPr id="3" name="Text 1"/>
+          <p:cNvSpPr txBox="1"/>
+          <p:nvPr/>
+        </p:nvSpPr>
+        <p:spPr>
+          <a:xfrm>
+            <a:off x="548640" y="960120"/>
+            <a:ext cx="8046720" cy="365760"/>
+          </a:xfrm>
+          <a:prstGeom prst="rect">
+            <a:avLst/>
+          </a:prstGeom>
+          <a:noFill/>
+          <a:ln/>
+        </p:spPr>
+        <p:txBody>
+          <a:bodyPr wrap="square" lIns="0" tIns="0" rIns="0" bIns="0" rtlCol="0" anchor="ctr"/>
+          <a:lstStyle/>
+          <a:p>
+            <a:pPr indent="0" marL="0">
+              <a:buNone/>
+            </a:pPr>
+            <a:r>
+              <a:rPr lang="en-US" sz="1600" dirty="0">
+                <a:solidFill>
+                  <a:srgbClr val="5F6E80"/>
+                </a:solidFill>
+                <a:latin typeface="Calibri" pitchFamily="34" charset="0"/>
+                <a:ea typeface="Calibri" pitchFamily="34" charset="-122"/>
+                <a:cs typeface="Calibri" pitchFamily="34" charset="-120"/>
+              </a:rPr>
+              <a:t>Misma forma, lados proporcionales</a:t>
+            </a:r>
+            <a:endParaRPr lang="en-US" sz="1600" dirty="0"/>
+          </a:p>
+        </p:txBody>
+      </p:sp>
+      <p:sp>
+        <p:nvSpPr>
+          <p:cNvPr id="4" name="Text 2"/>
+          <p:cNvSpPr txBox="1"/>
+          <p:nvPr/>
+        </p:nvSpPr>
+        <p:spPr>
+          <a:xfrm>
+            <a:off x="548640" y="4754880"/>
+            <a:ext cx="8046720" cy="228600"/>
+          </a:xfrm>
+          <a:prstGeom prst="rect">
+            <a:avLst/>
+          </a:prstGeom>
+          <a:noFill/>
+          <a:ln/>
+        </p:spPr>
+        <p:txBody>
+          <a:bodyPr wrap="square" lIns="0" tIns="0" rIns="0" bIns="0" rtlCol="0" anchor="ctr"/>
+          <a:lstStyle/>
+          <a:p>
+            <a:pPr indent="0" marL="0">
+              <a:buNone/>
+            </a:pPr>
+            <a:r>
+              <a:rPr lang="en-US" sz="1000" dirty="0">
+                <a:solidFill>
+                  <a:srgbClr val="8A98A8"/>
+                </a:solidFill>
+                <a:latin typeface="Calibri" pitchFamily="34" charset="0"/>
+                <a:ea typeface="Calibri" pitchFamily="34" charset="-122"/>
+                <a:cs typeface="Calibri" pitchFamily="34" charset="-120"/>
+              </a:rPr>
+              <a:t>Club de programación Competitiva - BugSquad 2026</a:t>
+            </a:r>
+            <a:endParaRPr lang="en-US" sz="1000" dirty="0"/>
+          </a:p>
+        </p:txBody>
+      </p:sp>
+      <p:sp>
+        <p:nvSpPr>
+          <p:cNvPr id="5" name="Shape 3"/>
+          <p:cNvSpPr/>
+          <p:nvPr/>
+        </p:nvSpPr>
+        <p:spPr>
+          <a:xfrm>
+            <a:off x="548640" y="1645920"/>
+            <a:ext cx="3840480" cy="2286000"/>
+          </a:xfrm>
+          <a:prstGeom prst="roundRect">
+            <a:avLst>
+              <a:gd name="adj" fmla="val 4800"/>
+            </a:avLst>
+          </a:prstGeom>
+          <a:solidFill>
+            <a:srgbClr val="DDE8F3"/>
+          </a:solidFill>
+          <a:ln w="12700">
+            <a:solidFill>
+              <a:srgbClr val="DDE8F3"/>
+            </a:solidFill>
+            <a:prstDash val="solid"/>
+          </a:ln>
+        </p:spPr>
+      </p:sp>
+      <p:sp>
+        <p:nvSpPr>
+          <p:cNvPr id="6" name="Text 4"/>
+          <p:cNvSpPr txBox="1"/>
+          <p:nvPr/>
+        </p:nvSpPr>
+        <p:spPr>
+          <a:xfrm>
+            <a:off x="822960" y="1828800"/>
+            <a:ext cx="3291840" cy="411480"/>
+          </a:xfrm>
+          <a:prstGeom prst="rect">
+            <a:avLst/>
+          </a:prstGeom>
+          <a:noFill/>
+          <a:ln/>
+        </p:spPr>
+        <p:txBody>
+          <a:bodyPr wrap="square" lIns="0" tIns="0" rIns="0" bIns="0" rtlCol="0" anchor="t"/>
+          <a:lstStyle/>
+          <a:p>
+            <a:pPr indent="0" marL="0">
+              <a:buNone/>
+            </a:pPr>
+            <a:r>
+              <a:rPr lang="en-US" sz="1800" b="1" dirty="0">
+                <a:solidFill>
+                  <a:srgbClr val="4F7CAC"/>
+                </a:solidFill>
+                <a:latin typeface="Calibri" pitchFamily="34" charset="0"/>
+                <a:ea typeface="Calibri" pitchFamily="34" charset="-122"/>
+                <a:cs typeface="Calibri" pitchFamily="34" charset="-120"/>
+              </a:rPr>
+              <a:t>Criterio AA</a:t>
+            </a:r>
+            <a:endParaRPr lang="en-US" sz="1800" dirty="0"/>
+          </a:p>
+        </p:txBody>
+      </p:sp>
+      <p:sp>
+        <p:nvSpPr>
+          <p:cNvPr id="7" name="Text 5"/>
+          <p:cNvSpPr txBox="1"/>
+          <p:nvPr/>
+        </p:nvSpPr>
+        <p:spPr>
+          <a:xfrm>
+            <a:off x="822960" y="2331720"/>
+            <a:ext cx="3291840" cy="1463040"/>
+          </a:xfrm>
+          <a:prstGeom prst="rect">
+            <a:avLst/>
+          </a:prstGeom>
+          <a:noFill/>
+          <a:ln/>
+        </p:spPr>
+        <p:txBody>
+          <a:bodyPr wrap="square" lIns="0" tIns="0" rIns="0" bIns="0" rtlCol="0" anchor="t"/>
+          <a:lstStyle/>
+          <a:p>
+            <a:pPr indent="0" marL="0">
+              <a:buNone/>
+            </a:pPr>
+            <a:r>
+              <a:rPr lang="en-US" sz="1500" dirty="0">
+                <a:solidFill>
+                  <a:srgbClr val="2F3E4E"/>
+                </a:solidFill>
+                <a:latin typeface="Calibri" pitchFamily="34" charset="0"/>
+                <a:ea typeface="Calibri" pitchFamily="34" charset="-122"/>
+                <a:cs typeface="Calibri" pitchFamily="34" charset="-120"/>
+              </a:rPr>
+              <a:t>Si dos ángulos de un triángulo son iguales a dos de otro, los triángulos son semejantes.</a:t>
+            </a:r>
+            <a:endParaRPr lang="en-US" sz="1500" dirty="0"/>
+          </a:p>
+        </p:txBody>
+      </p:sp>
+      <p:sp>
+        <p:nvSpPr>
+          <p:cNvPr id="8" name="Shape 6"/>
+          <p:cNvSpPr/>
+          <p:nvPr/>
+        </p:nvSpPr>
+        <p:spPr>
+          <a:xfrm>
+            <a:off x="4754880" y="1645920"/>
+            <a:ext cx="3840480" cy="2286000"/>
+          </a:xfrm>
+          <a:prstGeom prst="roundRect">
+            <a:avLst>
+              <a:gd name="adj" fmla="val 4800"/>
+            </a:avLst>
+          </a:prstGeom>
+          <a:solidFill>
+            <a:srgbClr val="E1F0E7"/>
+          </a:solidFill>
+          <a:ln w="12700">
+            <a:solidFill>
+              <a:srgbClr val="E1F0E7"/>
+            </a:solidFill>
+            <a:prstDash val="solid"/>
+          </a:ln>
+        </p:spPr>
+      </p:sp>
+      <p:sp>
+        <p:nvSpPr>
+          <p:cNvPr id="9" name="Text 7"/>
+          <p:cNvSpPr txBox="1"/>
+          <p:nvPr/>
+        </p:nvSpPr>
+        <p:spPr>
+          <a:xfrm>
+            <a:off x="5029200" y="1828800"/>
+            <a:ext cx="3291840" cy="411480"/>
+          </a:xfrm>
+          <a:prstGeom prst="rect">
+            <a:avLst/>
+          </a:prstGeom>
+          <a:noFill/>
+          <a:ln/>
+        </p:spPr>
+        <p:txBody>
+          <a:bodyPr wrap="square" lIns="0" tIns="0" rIns="0" bIns="0" rtlCol="0" anchor="t"/>
+          <a:lstStyle/>
+          <a:p>
+            <a:pPr indent="0" marL="0">
+              <a:buNone/>
+            </a:pPr>
+            <a:r>
+              <a:rPr lang="en-US" sz="1800" b="1" dirty="0">
+                <a:solidFill>
+                  <a:srgbClr val="6FA287"/>
+                </a:solidFill>
+                <a:latin typeface="Calibri" pitchFamily="34" charset="0"/>
+                <a:ea typeface="Calibri" pitchFamily="34" charset="-122"/>
+                <a:cs typeface="Calibri" pitchFamily="34" charset="-120"/>
+              </a:rPr>
+              <a:t>Lados homólogos</a:t>
+            </a:r>
+            <a:endParaRPr lang="en-US" sz="1800" dirty="0"/>
+          </a:p>
+        </p:txBody>
+      </p:sp>
+      <p:sp>
+        <p:nvSpPr>
+          <p:cNvPr id="10" name="Text 8"/>
+          <p:cNvSpPr txBox="1"/>
+          <p:nvPr/>
+        </p:nvSpPr>
+        <p:spPr>
+          <a:xfrm>
+            <a:off x="5029200" y="2331720"/>
+            <a:ext cx="3291840" cy="1463040"/>
+          </a:xfrm>
+          <a:prstGeom prst="rect">
+            <a:avLst/>
+          </a:prstGeom>
+          <a:noFill/>
+          <a:ln/>
+        </p:spPr>
+        <p:txBody>
+          <a:bodyPr wrap="square" lIns="0" tIns="0" rIns="0" bIns="0" rtlCol="0" anchor="t"/>
+          <a:lstStyle/>
+          <a:p>
+            <a:pPr indent="0" marL="0">
+              <a:buNone/>
+            </a:pPr>
+            <a:r>
+              <a:rPr lang="en-US" sz="1500" dirty="0">
+                <a:solidFill>
+                  <a:srgbClr val="2F3E4E"/>
+                </a:solidFill>
+                <a:latin typeface="Calibri" pitchFamily="34" charset="0"/>
+                <a:ea typeface="Calibri" pitchFamily="34" charset="-122"/>
+                <a:cs typeface="Calibri" pitchFamily="34" charset="-120"/>
+              </a:rPr>
+              <a:t>Los lados que se oponen a ángulos iguales tienen la misma proporción.</a:t>
+            </a:r>
+            <a:endParaRPr lang="en-US" sz="1500" dirty="0"/>
+          </a:p>
+        </p:txBody>
+      </p:sp>
+    </p:spTree>
+  </p:cSld>
+  <p:clrMapOvr>
+    <a:masterClrMapping/>
+  </p:clrMapOvr>
+</p:sld>
+</file>
+
+<file path=ppt/slides/slide18.xml><?xml version="1.0" encoding="utf-8"?>
+<p:sld xmlns:a="http://schemas.openxmlformats.org/drawingml/2006/main" xmlns:r="http://schemas.openxmlformats.org/officeDocument/2006/relationships" xmlns:p="http://schemas.openxmlformats.org/presentationml/2006/main">
+  <p:cSld name="Slide 18">
+    <p:bg>
+      <p:bgPr>
+        <a:solidFill>
+          <a:srgbClr val="FFFFFF"/>
+        </a:solidFill>
+      </p:bgPr>
+    </p:bg>
+    <p:spTree>
+      <p:nvGrpSpPr>
+        <p:cNvPr id="1" name=""/>
+        <p:cNvGrpSpPr/>
+        <p:nvPr/>
+      </p:nvGrpSpPr>
+      <p:grpSpPr>
+        <a:xfrm>
+          <a:off x="0" y="0"/>
+          <a:ext cx="0" cy="0"/>
+          <a:chOff x="0" y="0"/>
+          <a:chExt cx="0" cy="0"/>
+        </a:xfrm>
+      </p:grpSpPr>
+      <p:sp>
+        <p:nvSpPr>
+          <p:cNvPr id="2" name="Text 0"/>
+          <p:cNvSpPr txBox="1"/>
+          <p:nvPr/>
+        </p:nvSpPr>
+        <p:spPr>
+          <a:xfrm>
+            <a:off x="548640" y="320040"/>
+            <a:ext cx="8046720" cy="640080"/>
+          </a:xfrm>
+          <a:prstGeom prst="rect">
+            <a:avLst/>
+          </a:prstGeom>
+          <a:noFill/>
+          <a:ln/>
+        </p:spPr>
+        <p:txBody>
+          <a:bodyPr wrap="square" lIns="0" tIns="0" rIns="0" bIns="0" rtlCol="0" anchor="ctr"/>
+          <a:lstStyle/>
+          <a:p>
+            <a:pPr indent="0" marL="0">
+              <a:buNone/>
+            </a:pPr>
+            <a:r>
+              <a:rPr lang="en-US" sz="3000" b="1" dirty="0">
+                <a:solidFill>
+                  <a:srgbClr val="2F3E4E"/>
+                </a:solidFill>
+                <a:latin typeface="Cambria" pitchFamily="34" charset="0"/>
+                <a:ea typeface="Cambria" pitchFamily="34" charset="-122"/>
+                <a:cs typeface="Cambria" pitchFamily="34" charset="-120"/>
+              </a:rPr>
+              <a:t>Teorema de Tales</a:t>
+            </a:r>
+            <a:endParaRPr lang="en-US" sz="3000" dirty="0"/>
+          </a:p>
+        </p:txBody>
+      </p:sp>
+      <p:sp>
+        <p:nvSpPr>
+          <p:cNvPr id="3" name="Text 1"/>
+          <p:cNvSpPr txBox="1"/>
+          <p:nvPr/>
+        </p:nvSpPr>
+        <p:spPr>
+          <a:xfrm>
+            <a:off x="548640" y="960120"/>
+            <a:ext cx="8046720" cy="365760"/>
+          </a:xfrm>
+          <a:prstGeom prst="rect">
+            <a:avLst/>
+          </a:prstGeom>
+          <a:noFill/>
+          <a:ln/>
+        </p:spPr>
+        <p:txBody>
+          <a:bodyPr wrap="square" lIns="0" tIns="0" rIns="0" bIns="0" rtlCol="0" anchor="ctr"/>
+          <a:lstStyle/>
+          <a:p>
+            <a:pPr indent="0" marL="0">
+              <a:buNone/>
+            </a:pPr>
+            <a:r>
+              <a:rPr lang="en-US" sz="1600" dirty="0">
+                <a:solidFill>
+                  <a:srgbClr val="5F6E80"/>
+                </a:solidFill>
+                <a:latin typeface="Calibri" pitchFamily="34" charset="0"/>
+                <a:ea typeface="Calibri" pitchFamily="34" charset="-122"/>
+                <a:cs typeface="Calibri" pitchFamily="34" charset="-120"/>
+              </a:rPr>
+              <a:t>Una paralela a un lado divide a los otros dos en la misma proporción</a:t>
+            </a:r>
+            <a:endParaRPr lang="en-US" sz="1600" dirty="0"/>
+          </a:p>
+        </p:txBody>
+      </p:sp>
+      <p:sp>
+        <p:nvSpPr>
+          <p:cNvPr id="4" name="Text 2"/>
+          <p:cNvSpPr txBox="1"/>
+          <p:nvPr/>
+        </p:nvSpPr>
+        <p:spPr>
+          <a:xfrm>
+            <a:off x="548640" y="4754880"/>
+            <a:ext cx="8046720" cy="228600"/>
+          </a:xfrm>
+          <a:prstGeom prst="rect">
+            <a:avLst/>
+          </a:prstGeom>
+          <a:noFill/>
+          <a:ln/>
+        </p:spPr>
+        <p:txBody>
+          <a:bodyPr wrap="square" lIns="0" tIns="0" rIns="0" bIns="0" rtlCol="0" anchor="ctr"/>
+          <a:lstStyle/>
+          <a:p>
+            <a:pPr indent="0" marL="0">
+              <a:buNone/>
+            </a:pPr>
+            <a:r>
+              <a:rPr lang="en-US" sz="1000" dirty="0">
+                <a:solidFill>
+                  <a:srgbClr val="8A98A8"/>
+                </a:solidFill>
+                <a:latin typeface="Calibri" pitchFamily="34" charset="0"/>
+                <a:ea typeface="Calibri" pitchFamily="34" charset="-122"/>
+                <a:cs typeface="Calibri" pitchFamily="34" charset="-120"/>
+              </a:rPr>
+              <a:t>Club de programación Competitiva - BugSquad 2026</a:t>
+            </a:r>
+            <a:endParaRPr lang="en-US" sz="1000" dirty="0"/>
+          </a:p>
+        </p:txBody>
+      </p:sp>
+      <p:sp>
+        <p:nvSpPr>
+          <p:cNvPr id="5" name="Shape 3"/>
+          <p:cNvSpPr/>
+          <p:nvPr/>
+        </p:nvSpPr>
+        <p:spPr>
+          <a:xfrm>
+            <a:off x="1645920" y="1737360"/>
+            <a:ext cx="5852160" cy="1005840"/>
+          </a:xfrm>
+          <a:prstGeom prst="roundRect">
+            <a:avLst>
+              <a:gd name="adj" fmla="val 10909"/>
+            </a:avLst>
+          </a:prstGeom>
+          <a:solidFill>
+            <a:srgbClr val="DDE8F3"/>
+          </a:solidFill>
+          <a:ln w="12700">
+            <a:solidFill>
+              <a:srgbClr val="DDE8F3"/>
+            </a:solidFill>
+            <a:prstDash val="solid"/>
+          </a:ln>
+        </p:spPr>
+      </p:sp>
+      <p:sp>
+        <p:nvSpPr>
+          <p:cNvPr id="6" name="Text 4"/>
+          <p:cNvSpPr txBox="1"/>
+          <p:nvPr/>
+        </p:nvSpPr>
+        <p:spPr>
+          <a:xfrm>
+            <a:off x="1645920" y="1737360"/>
+            <a:ext cx="5852160" cy="1005840"/>
+          </a:xfrm>
+          <a:prstGeom prst="rect">
+            <a:avLst/>
+          </a:prstGeom>
+          <a:noFill/>
+          <a:ln/>
+        </p:spPr>
+        <p:txBody>
+          <a:bodyPr wrap="square" lIns="0" tIns="0" rIns="0" bIns="0" rtlCol="0" anchor="ctr"/>
+          <a:lstStyle/>
+          <a:p>
+            <a:pPr algn="ctr" indent="0" marL="0">
+              <a:buNone/>
+            </a:pPr>
+            <a:r>
+              <a:rPr lang="en-US" sz="2600" b="1" dirty="0">
+                <a:solidFill>
+                  <a:srgbClr val="2F3E4E"/>
+                </a:solidFill>
+                <a:latin typeface="Calibri" pitchFamily="34" charset="0"/>
+                <a:ea typeface="Calibri" pitchFamily="34" charset="-122"/>
+                <a:cs typeface="Calibri" pitchFamily="34" charset="-120"/>
+              </a:rPr>
+              <a:t>AD / DB = AE / EC</a:t>
+            </a:r>
+            <a:endParaRPr lang="en-US" sz="2600" dirty="0"/>
+          </a:p>
+        </p:txBody>
+      </p:sp>
+      <p:sp>
+        <p:nvSpPr>
+          <p:cNvPr id="7" name="Text 5"/>
+          <p:cNvSpPr txBox="1"/>
+          <p:nvPr/>
+        </p:nvSpPr>
+        <p:spPr>
+          <a:xfrm>
+            <a:off x="548640" y="3017520"/>
+            <a:ext cx="8046720" cy="1463040"/>
+          </a:xfrm>
+          <a:prstGeom prst="rect">
+            <a:avLst/>
+          </a:prstGeom>
+          <a:noFill/>
+          <a:ln/>
+        </p:spPr>
+        <p:txBody>
+          <a:bodyPr wrap="square" lIns="0" tIns="0" rIns="0" bIns="0" rtlCol="0" anchor="t"/>
+          <a:lstStyle/>
+          <a:p>
+            <a:pPr marL="342900" indent="-342900">
+              <a:spcAft>
+                <a:spcPts val="600"/>
+              </a:spcAft>
+              <a:buSzPct val="100000"/>
+              <a:buChar char="•"/>
+            </a:pPr>
+            <a:r>
+              <a:rPr lang="en-US" sz="1700" dirty="0">
+                <a:solidFill>
+                  <a:srgbClr val="2F3E4E"/>
+                </a:solidFill>
+                <a:latin typeface="Calibri" pitchFamily="34" charset="0"/>
+                <a:ea typeface="Calibri" pitchFamily="34" charset="-122"/>
+                <a:cs typeface="Calibri" pitchFamily="34" charset="-120"/>
+              </a:rPr>
+              <a:t>Si DE es paralelo a BC, con D en AB y E en AC.</a:t>
+            </a:r>
+            <a:endParaRPr lang="en-US" sz="1700" dirty="0"/>
+          </a:p>
+          <a:p>
+            <a:pPr marL="342900" indent="-342900">
+              <a:spcAft>
+                <a:spcPts val="600"/>
+              </a:spcAft>
+              <a:buSzPct val="100000"/>
+              <a:buChar char="•"/>
+            </a:pPr>
+            <a:r>
+              <a:rPr lang="en-US" sz="1700" dirty="0">
+                <a:solidFill>
+                  <a:srgbClr val="2F3E4E"/>
+                </a:solidFill>
+                <a:latin typeface="Calibri" pitchFamily="34" charset="0"/>
+                <a:ea typeface="Calibri" pitchFamily="34" charset="-122"/>
+                <a:cs typeface="Calibri" pitchFamily="34" charset="-120"/>
+              </a:rPr>
+              <a:t>También: AD / AB = AE / AC = DE / BC.</a:t>
+            </a:r>
+            <a:endParaRPr lang="en-US" sz="1700" dirty="0"/>
+          </a:p>
+        </p:txBody>
+      </p:sp>
+    </p:spTree>
+  </p:cSld>
+  <p:clrMapOvr>
+    <a:masterClrMapping/>
+  </p:clrMapOvr>
+</p:sld>
+</file>
+
+<file path=ppt/slides/slide19.xml><?xml version="1.0" encoding="utf-8"?>
+<p:sld xmlns:a="http://schemas.openxmlformats.org/drawingml/2006/main" xmlns:r="http://schemas.openxmlformats.org/officeDocument/2006/relationships" xmlns:p="http://schemas.openxmlformats.org/presentationml/2006/main">
+  <p:cSld name="Slide 19">
+    <p:bg>
+      <p:bgPr>
+        <a:solidFill>
+          <a:srgbClr val="FFFFFF"/>
+        </a:solidFill>
+      </p:bgPr>
+    </p:bg>
+    <p:spTree>
+      <p:nvGrpSpPr>
+        <p:cNvPr id="1" name=""/>
+        <p:cNvGrpSpPr/>
+        <p:nvPr/>
+      </p:nvGrpSpPr>
+      <p:grpSpPr>
+        <a:xfrm>
+          <a:off x="0" y="0"/>
+          <a:ext cx="0" cy="0"/>
+          <a:chOff x="0" y="0"/>
+          <a:chExt cx="0" cy="0"/>
+        </a:xfrm>
+      </p:grpSpPr>
+      <p:sp>
+        <p:nvSpPr>
+          <p:cNvPr id="2" name="Text 0"/>
+          <p:cNvSpPr txBox="1"/>
+          <p:nvPr/>
+        </p:nvSpPr>
+        <p:spPr>
+          <a:xfrm>
+            <a:off x="548640" y="320040"/>
+            <a:ext cx="8046720" cy="640080"/>
+          </a:xfrm>
+          <a:prstGeom prst="rect">
+            <a:avLst/>
+          </a:prstGeom>
+          <a:noFill/>
+          <a:ln/>
+        </p:spPr>
+        <p:txBody>
+          <a:bodyPr wrap="square" lIns="0" tIns="0" rIns="0" bIns="0" rtlCol="0" anchor="ctr"/>
+          <a:lstStyle/>
+          <a:p>
+            <a:pPr indent="0" marL="0">
+              <a:buNone/>
+            </a:pPr>
+            <a:r>
+              <a:rPr lang="en-US" sz="3000" b="1" dirty="0">
+                <a:solidFill>
+                  <a:srgbClr val="2F3E4E"/>
+                </a:solidFill>
+                <a:latin typeface="Cambria" pitchFamily="34" charset="0"/>
+                <a:ea typeface="Cambria" pitchFamily="34" charset="-122"/>
+                <a:cs typeface="Cambria" pitchFamily="34" charset="-120"/>
+              </a:rPr>
+              <a:t>Ejemplo: segmento paralelo</a:t>
+            </a:r>
+            <a:endParaRPr lang="en-US" sz="3000" dirty="0"/>
+          </a:p>
+        </p:txBody>
+      </p:sp>
+      <p:sp>
+        <p:nvSpPr>
+          <p:cNvPr id="3" name="Text 1"/>
+          <p:cNvSpPr txBox="1"/>
+          <p:nvPr/>
+        </p:nvSpPr>
+        <p:spPr>
+          <a:xfrm>
+            <a:off x="548640" y="960120"/>
+            <a:ext cx="8046720" cy="365760"/>
+          </a:xfrm>
+          <a:prstGeom prst="rect">
+            <a:avLst/>
+          </a:prstGeom>
+          <a:noFill/>
+          <a:ln/>
+        </p:spPr>
+        <p:txBody>
+          <a:bodyPr wrap="square" lIns="0" tIns="0" rIns="0" bIns="0" rtlCol="0" anchor="ctr"/>
+          <a:lstStyle/>
+          <a:p>
+            <a:pPr indent="0" marL="0">
+              <a:buNone/>
+            </a:pPr>
+            <a:r>
+              <a:rPr lang="en-US" sz="1600" dirty="0">
+                <a:solidFill>
+                  <a:srgbClr val="5F6E80"/>
+                </a:solidFill>
+                <a:latin typeface="Calibri" pitchFamily="34" charset="0"/>
+                <a:ea typeface="Calibri" pitchFamily="34" charset="-122"/>
+                <a:cs typeface="Calibri" pitchFamily="34" charset="-120"/>
+              </a:rPr>
+              <a:t>AB = 15 cm, AC = 20 cm, AD = 6 cm, DE paralelo a BC</a:t>
+            </a:r>
+            <a:endParaRPr lang="en-US" sz="1600" dirty="0"/>
+          </a:p>
+        </p:txBody>
+      </p:sp>
+      <p:sp>
+        <p:nvSpPr>
+          <p:cNvPr id="4" name="Text 2"/>
+          <p:cNvSpPr txBox="1"/>
+          <p:nvPr/>
+        </p:nvSpPr>
+        <p:spPr>
+          <a:xfrm>
+            <a:off x="548640" y="4754880"/>
+            <a:ext cx="8046720" cy="228600"/>
+          </a:xfrm>
+          <a:prstGeom prst="rect">
+            <a:avLst/>
+          </a:prstGeom>
+          <a:noFill/>
+          <a:ln/>
+        </p:spPr>
+        <p:txBody>
+          <a:bodyPr wrap="square" lIns="0" tIns="0" rIns="0" bIns="0" rtlCol="0" anchor="ctr"/>
+          <a:lstStyle/>
+          <a:p>
+            <a:pPr indent="0" marL="0">
+              <a:buNone/>
+            </a:pPr>
+            <a:r>
+              <a:rPr lang="en-US" sz="1000" dirty="0">
+                <a:solidFill>
+                  <a:srgbClr val="8A98A8"/>
+                </a:solidFill>
+                <a:latin typeface="Calibri" pitchFamily="34" charset="0"/>
+                <a:ea typeface="Calibri" pitchFamily="34" charset="-122"/>
+                <a:cs typeface="Calibri" pitchFamily="34" charset="-120"/>
+              </a:rPr>
+              <a:t>Club de programación Competitiva - BugSquad 2026</a:t>
+            </a:r>
+            <a:endParaRPr lang="en-US" sz="1000" dirty="0"/>
+          </a:p>
+        </p:txBody>
+      </p:sp>
+      <p:sp>
+        <p:nvSpPr>
+          <p:cNvPr id="5" name="Text 3"/>
+          <p:cNvSpPr txBox="1"/>
+          <p:nvPr/>
+        </p:nvSpPr>
+        <p:spPr>
+          <a:xfrm>
+            <a:off x="548640" y="1645920"/>
+            <a:ext cx="8046720" cy="1828800"/>
+          </a:xfrm>
+          <a:prstGeom prst="rect">
+            <a:avLst/>
+          </a:prstGeom>
+          <a:noFill/>
+          <a:ln/>
+        </p:spPr>
+        <p:txBody>
+          <a:bodyPr wrap="square" lIns="0" tIns="0" rIns="0" bIns="0" rtlCol="0" anchor="t"/>
+          <a:lstStyle/>
+          <a:p>
+            <a:pPr marL="342900" indent="-342900">
+              <a:spcAft>
+                <a:spcPts val="600"/>
+              </a:spcAft>
+              <a:buSzPct val="100000"/>
+              <a:buChar char="•"/>
+            </a:pPr>
+            <a:r>
+              <a:rPr lang="en-US" sz="1800" dirty="0">
+                <a:solidFill>
+                  <a:srgbClr val="2F3E4E"/>
+                </a:solidFill>
+                <a:latin typeface="Calibri" pitchFamily="34" charset="0"/>
+                <a:ea typeface="Calibri" pitchFamily="34" charset="-122"/>
+                <a:cs typeface="Calibri" pitchFamily="34" charset="-120"/>
+              </a:rPr>
+              <a:t>AD / AB = AE / AC, así que 6 / 15 = AE / 20.</a:t>
+            </a:r>
+            <a:endParaRPr lang="en-US" sz="1800" dirty="0"/>
+          </a:p>
+          <a:p>
+            <a:pPr marL="342900" indent="-342900">
+              <a:spcAft>
+                <a:spcPts val="600"/>
+              </a:spcAft>
+              <a:buSzPct val="100000"/>
+              <a:buChar char="•"/>
+            </a:pPr>
+            <a:r>
+              <a:rPr lang="en-US" sz="1800" dirty="0">
+                <a:solidFill>
+                  <a:srgbClr val="2F3E4E"/>
+                </a:solidFill>
+                <a:latin typeface="Calibri" pitchFamily="34" charset="0"/>
+                <a:ea typeface="Calibri" pitchFamily="34" charset="-122"/>
+                <a:cs typeface="Calibri" pitchFamily="34" charset="-120"/>
+              </a:rPr>
+              <a:t>Simplificamos 6 / 15 = 2 / 5, y despejamos AE = 2 · 20 / 5.</a:t>
+            </a:r>
+            <a:endParaRPr lang="en-US" sz="1800" dirty="0"/>
+          </a:p>
+        </p:txBody>
+      </p:sp>
+      <p:sp>
+        <p:nvSpPr>
+          <p:cNvPr id="6" name="Shape 4"/>
+          <p:cNvSpPr/>
+          <p:nvPr/>
+        </p:nvSpPr>
+        <p:spPr>
+          <a:xfrm>
+            <a:off x="2926080" y="3566160"/>
+            <a:ext cx="3291840" cy="822960"/>
+          </a:xfrm>
+          <a:prstGeom prst="roundRect">
+            <a:avLst>
+              <a:gd name="adj" fmla="val 13333"/>
+            </a:avLst>
+          </a:prstGeom>
+          <a:solidFill>
+            <a:srgbClr val="E1F0E7"/>
+          </a:solidFill>
+          <a:ln w="12700">
+            <a:solidFill>
+              <a:srgbClr val="E1F0E7"/>
+            </a:solidFill>
+            <a:prstDash val="solid"/>
+          </a:ln>
+        </p:spPr>
+      </p:sp>
+      <p:sp>
+        <p:nvSpPr>
+          <p:cNvPr id="7" name="Text 5"/>
+          <p:cNvSpPr txBox="1"/>
+          <p:nvPr/>
+        </p:nvSpPr>
+        <p:spPr>
+          <a:xfrm>
+            <a:off x="2926080" y="3566160"/>
+            <a:ext cx="3291840" cy="822960"/>
+          </a:xfrm>
+          <a:prstGeom prst="rect">
+            <a:avLst/>
+          </a:prstGeom>
+          <a:noFill/>
+          <a:ln/>
+        </p:spPr>
+        <p:txBody>
+          <a:bodyPr wrap="square" lIns="0" tIns="0" rIns="0" bIns="0" rtlCol="0" anchor="ctr"/>
+          <a:lstStyle/>
+          <a:p>
+            <a:pPr algn="ctr" indent="0" marL="0">
+              <a:buNone/>
+            </a:pPr>
+            <a:r>
+              <a:rPr lang="en-US" sz="2400" b="1" dirty="0">
+                <a:solidFill>
+                  <a:srgbClr val="2F3E4E"/>
+                </a:solidFill>
+                <a:latin typeface="Calibri" pitchFamily="34" charset="0"/>
+                <a:ea typeface="Calibri" pitchFamily="34" charset="-122"/>
+                <a:cs typeface="Calibri" pitchFamily="34" charset="-120"/>
+              </a:rPr>
+              <a:t>AE = 8 cm</a:t>
+            </a:r>
+            <a:endParaRPr lang="en-US" sz="2400" dirty="0"/>
+          </a:p>
+        </p:txBody>
+      </p:sp>
+    </p:spTree>
+  </p:cSld>
+  <p:clrMapOvr>
+    <a:masterClrMapping/>
+  </p:clrMapOvr>
+</p:sld>
+</file>
+
+<file path=ppt/slides/slide2.xml><?xml version="1.0" encoding="utf-8"?>
+<p:sld xmlns:a="http://schemas.openxmlformats.org/drawingml/2006/main" xmlns:r="http://schemas.openxmlformats.org/officeDocument/2006/relationships" xmlns:p="http://schemas.openxmlformats.org/presentationml/2006/main">
+  <p:cSld name="Slide 2">
+    <p:bg>
+      <p:bgPr>
+        <a:solidFill>
+          <a:srgbClr val="FFFFFF"/>
+        </a:solidFill>
+      </p:bgPr>
+    </p:bg>
+    <p:spTree>
+      <p:nvGrpSpPr>
+        <p:cNvPr id="1" name=""/>
+        <p:cNvGrpSpPr/>
+        <p:nvPr/>
+      </p:nvGrpSpPr>
+      <p:grpSpPr>
+        <a:xfrm>
+          <a:off x="0" y="0"/>
+          <a:ext cx="0" cy="0"/>
+          <a:chOff x="0" y="0"/>
+          <a:chExt cx="0" cy="0"/>
+        </a:xfrm>
+      </p:grpSpPr>
+      <p:sp>
+        <p:nvSpPr>
+          <p:cNvPr id="2" name="Text 0"/>
+          <p:cNvSpPr txBox="1"/>
+          <p:nvPr/>
+        </p:nvSpPr>
+        <p:spPr>
+          <a:xfrm>
+            <a:off x="548640" y="320040"/>
+            <a:ext cx="8046720" cy="640080"/>
+          </a:xfrm>
+          <a:prstGeom prst="rect">
+            <a:avLst/>
+          </a:prstGeom>
+          <a:noFill/>
+          <a:ln/>
+        </p:spPr>
+        <p:txBody>
+          <a:bodyPr wrap="square" lIns="0" tIns="0" rIns="0" bIns="0" rtlCol="0" anchor="ctr"/>
+          <a:lstStyle/>
+          <a:p>
+            <a:pPr indent="0" marL="0">
+              <a:buNone/>
+            </a:pPr>
+            <a:r>
+              <a:rPr lang="en-US" sz="3000" b="1" dirty="0">
+                <a:solidFill>
+                  <a:srgbClr val="2F3E4E"/>
+                </a:solidFill>
+                <a:latin typeface="Cambria" pitchFamily="34" charset="0"/>
+                <a:ea typeface="Cambria" pitchFamily="34" charset="-122"/>
+                <a:cs typeface="Cambria" pitchFamily="34" charset="-120"/>
+              </a:rPr>
+              <a:t>Medir figuras y distancias</a:t>
+            </a:r>
+            <a:endParaRPr lang="en-US" sz="3000" dirty="0"/>
+          </a:p>
+        </p:txBody>
+      </p:sp>
+      <p:sp>
+        <p:nvSpPr>
+          <p:cNvPr id="3" name="Text 1"/>
+          <p:cNvSpPr txBox="1"/>
+          <p:nvPr/>
+        </p:nvSpPr>
+        <p:spPr>
+          <a:xfrm>
+            <a:off x="548640" y="960120"/>
+            <a:ext cx="8046720" cy="365760"/>
+          </a:xfrm>
+          <a:prstGeom prst="rect">
+            <a:avLst/>
+          </a:prstGeom>
+          <a:noFill/>
+          <a:ln/>
+        </p:spPr>
+        <p:txBody>
+          <a:bodyPr wrap="square" lIns="0" tIns="0" rIns="0" bIns="0" rtlCol="0" anchor="ctr"/>
+          <a:lstStyle/>
+          <a:p>
+            <a:pPr indent="0" marL="0">
+              <a:buNone/>
+            </a:pPr>
+            <a:r>
+              <a:rPr lang="en-US" sz="1600" dirty="0">
+                <a:solidFill>
+                  <a:srgbClr val="5F6E80"/>
+                </a:solidFill>
+                <a:latin typeface="Calibri" pitchFamily="34" charset="0"/>
+                <a:ea typeface="Calibri" pitchFamily="34" charset="-122"/>
+                <a:cs typeface="Calibri" pitchFamily="34" charset="-120"/>
+              </a:rPr>
+              <a:t>Traducir formas y relaciones a números exactos</a:t>
+            </a:r>
+            <a:endParaRPr lang="en-US" sz="1600" dirty="0"/>
+          </a:p>
+        </p:txBody>
+      </p:sp>
+      <p:sp>
+        <p:nvSpPr>
+          <p:cNvPr id="4" name="Text 2"/>
+          <p:cNvSpPr txBox="1"/>
+          <p:nvPr/>
+        </p:nvSpPr>
+        <p:spPr>
+          <a:xfrm>
+            <a:off x="548640" y="4754880"/>
+            <a:ext cx="8046720" cy="228600"/>
+          </a:xfrm>
+          <a:prstGeom prst="rect">
+            <a:avLst/>
+          </a:prstGeom>
+          <a:noFill/>
+          <a:ln/>
+        </p:spPr>
+        <p:txBody>
+          <a:bodyPr wrap="square" lIns="0" tIns="0" rIns="0" bIns="0" rtlCol="0" anchor="ctr"/>
+          <a:lstStyle/>
+          <a:p>
+            <a:pPr indent="0" marL="0">
+              <a:buNone/>
+            </a:pPr>
+            <a:r>
+              <a:rPr lang="en-US" sz="1000" dirty="0">
+                <a:solidFill>
+                  <a:srgbClr val="8A98A8"/>
+                </a:solidFill>
+                <a:latin typeface="Calibri" pitchFamily="34" charset="0"/>
+                <a:ea typeface="Calibri" pitchFamily="34" charset="-122"/>
+                <a:cs typeface="Calibri" pitchFamily="34" charset="-120"/>
+              </a:rPr>
+              <a:t>Club de programación Competitiva - BugSquad 2026</a:t>
+            </a:r>
+            <a:endParaRPr lang="en-US" sz="1000" dirty="0"/>
+          </a:p>
+        </p:txBody>
+      </p:sp>
+      <p:sp>
+        <p:nvSpPr>
+          <p:cNvPr id="5" name="Shape 3"/>
+          <p:cNvSpPr/>
+          <p:nvPr/>
+        </p:nvSpPr>
+        <p:spPr>
+          <a:xfrm>
+            <a:off x="548640" y="1645920"/>
+            <a:ext cx="1874520" cy="2377440"/>
+          </a:xfrm>
+          <a:prstGeom prst="roundRect">
+            <a:avLst>
+              <a:gd name="adj" fmla="val 5854"/>
+            </a:avLst>
+          </a:prstGeom>
+          <a:solidFill>
+            <a:srgbClr val="DDE8F3"/>
+          </a:solidFill>
+          <a:ln w="12700">
+            <a:solidFill>
+              <a:srgbClr val="DDE8F3"/>
+            </a:solidFill>
+            <a:prstDash val="solid"/>
+          </a:ln>
+        </p:spPr>
+      </p:sp>
+      <p:sp>
+        <p:nvSpPr>
+          <p:cNvPr id="6" name="Shape 4"/>
+          <p:cNvSpPr/>
+          <p:nvPr/>
+        </p:nvSpPr>
+        <p:spPr>
+          <a:xfrm>
+            <a:off x="731520" y="1828800"/>
+            <a:ext cx="548640" cy="548640"/>
+          </a:xfrm>
+          <a:prstGeom prst="ellipse">
+            <a:avLst/>
+          </a:prstGeom>
+          <a:solidFill>
+            <a:srgbClr val="4F7CAC"/>
+          </a:solidFill>
+          <a:ln w="12700">
+            <a:solidFill>
+              <a:srgbClr val="4F7CAC"/>
+            </a:solidFill>
+            <a:prstDash val="solid"/>
+          </a:ln>
+        </p:spPr>
+      </p:sp>
+      <p:pic>
+        <p:nvPicPr>
+          <p:cNvPr id="7" name="Image 0" descr="preencoded.png">    </p:cNvPr>
+          <p:cNvPicPr>
+            <a:picLocks noChangeAspect="1"/>
+          </p:cNvPicPr>
+          <p:nvPr/>
+        </p:nvPicPr>
+        <p:blipFill>
+          <a:blip r:embed="rId1"/>
+          <a:stretch>
+            <a:fillRect/>
+          </a:stretch>
+        </p:blipFill>
+        <p:spPr>
+          <a:xfrm>
+            <a:off x="879653" y="1976933"/>
+            <a:ext cx="252374" cy="252374"/>
+          </a:xfrm>
+          <a:prstGeom prst="rect">
+            <a:avLst/>
+          </a:prstGeom>
+        </p:spPr>
+      </p:pic>
+      <p:sp>
+        <p:nvSpPr>
+          <p:cNvPr id="8" name="Text 5"/>
+          <p:cNvSpPr txBox="1"/>
+          <p:nvPr/>
+        </p:nvSpPr>
+        <p:spPr>
+          <a:xfrm>
+            <a:off x="731520" y="2514600"/>
+            <a:ext cx="1508760" cy="548640"/>
+          </a:xfrm>
+          <a:prstGeom prst="rect">
+            <a:avLst/>
+          </a:prstGeom>
+          <a:noFill/>
+          <a:ln/>
+        </p:spPr>
+        <p:txBody>
+          <a:bodyPr wrap="square" lIns="0" tIns="0" rIns="0" bIns="0" rtlCol="0" anchor="t"/>
+          <a:lstStyle/>
+          <a:p>
+            <a:pPr indent="0" marL="0">
+              <a:buNone/>
+            </a:pPr>
+            <a:r>
+              <a:rPr lang="en-US" sz="1600" b="1" dirty="0">
+                <a:solidFill>
+                  <a:srgbClr val="2F3E4E"/>
+                </a:solidFill>
+                <a:latin typeface="Calibri" pitchFamily="34" charset="0"/>
+                <a:ea typeface="Calibri" pitchFamily="34" charset="-122"/>
+                <a:cs typeface="Calibri" pitchFamily="34" charset="-120"/>
+              </a:rPr>
+              <a:t>9 · Ángulos</a:t>
+            </a:r>
+            <a:endParaRPr lang="en-US" sz="1600" dirty="0"/>
+          </a:p>
+        </p:txBody>
+      </p:sp>
+      <p:sp>
+        <p:nvSpPr>
+          <p:cNvPr id="9" name="Text 6"/>
+          <p:cNvSpPr txBox="1"/>
+          <p:nvPr/>
+        </p:nvSpPr>
+        <p:spPr>
+          <a:xfrm>
+            <a:off x="731520" y="3108960"/>
+            <a:ext cx="1508760" cy="868680"/>
+          </a:xfrm>
+          <a:prstGeom prst="rect">
+            <a:avLst/>
+          </a:prstGeom>
+          <a:noFill/>
+          <a:ln/>
+        </p:spPr>
+        <p:txBody>
+          <a:bodyPr wrap="square" lIns="0" tIns="0" rIns="0" bIns="0" rtlCol="0" anchor="t"/>
+          <a:lstStyle/>
+          <a:p>
+            <a:pPr indent="0" marL="0">
+              <a:buNone/>
+            </a:pPr>
+            <a:r>
+              <a:rPr lang="en-US" sz="1300" dirty="0">
+                <a:solidFill>
+                  <a:srgbClr val="2F3E4E"/>
+                </a:solidFill>
+                <a:latin typeface="Calibri" pitchFamily="34" charset="0"/>
+                <a:ea typeface="Calibri" pitchFamily="34" charset="-122"/>
+                <a:cs typeface="Calibri" pitchFamily="34" charset="-120"/>
+              </a:rPr>
+              <a:t>Ángulos, triángulos y polígonos.</a:t>
+            </a:r>
+            <a:endParaRPr lang="en-US" sz="1300" dirty="0"/>
+          </a:p>
+        </p:txBody>
+      </p:sp>
+      <p:sp>
+        <p:nvSpPr>
+          <p:cNvPr id="10" name="Shape 7"/>
+          <p:cNvSpPr/>
+          <p:nvPr/>
+        </p:nvSpPr>
+        <p:spPr>
+          <a:xfrm>
+            <a:off x="2606040" y="1645920"/>
+            <a:ext cx="1874520" cy="2377440"/>
+          </a:xfrm>
+          <a:prstGeom prst="roundRect">
+            <a:avLst>
+              <a:gd name="adj" fmla="val 5854"/>
+            </a:avLst>
+          </a:prstGeom>
+          <a:solidFill>
+            <a:srgbClr val="E1F0E7"/>
+          </a:solidFill>
+          <a:ln w="12700">
+            <a:solidFill>
+              <a:srgbClr val="E1F0E7"/>
+            </a:solidFill>
+            <a:prstDash val="solid"/>
+          </a:ln>
+        </p:spPr>
+      </p:sp>
+      <p:sp>
+        <p:nvSpPr>
+          <p:cNvPr id="11" name="Shape 8"/>
+          <p:cNvSpPr/>
+          <p:nvPr/>
+        </p:nvSpPr>
+        <p:spPr>
+          <a:xfrm>
+            <a:off x="2788920" y="1828800"/>
+            <a:ext cx="548640" cy="548640"/>
+          </a:xfrm>
+          <a:prstGeom prst="ellipse">
+            <a:avLst/>
+          </a:prstGeom>
+          <a:solidFill>
+            <a:srgbClr val="6FA287"/>
+          </a:solidFill>
+          <a:ln w="12700">
+            <a:solidFill>
+              <a:srgbClr val="6FA287"/>
+            </a:solidFill>
+            <a:prstDash val="solid"/>
+          </a:ln>
+        </p:spPr>
+      </p:sp>
+      <p:pic>
+        <p:nvPicPr>
+          <p:cNvPr id="12" name="Image 1" descr="preencoded.png">    </p:cNvPr>
+          <p:cNvPicPr>
+            <a:picLocks noChangeAspect="1"/>
+          </p:cNvPicPr>
+          <p:nvPr/>
+        </p:nvPicPr>
+        <p:blipFill>
+          <a:blip r:embed="rId2"/>
+          <a:stretch>
+            <a:fillRect/>
+          </a:stretch>
+        </p:blipFill>
+        <p:spPr>
+          <a:xfrm>
+            <a:off x="2937053" y="1976933"/>
+            <a:ext cx="252374" cy="252374"/>
+          </a:xfrm>
+          <a:prstGeom prst="rect">
+            <a:avLst/>
+          </a:prstGeom>
+        </p:spPr>
+      </p:pic>
+      <p:sp>
+        <p:nvSpPr>
+          <p:cNvPr id="13" name="Text 9"/>
+          <p:cNvSpPr txBox="1"/>
+          <p:nvPr/>
+        </p:nvSpPr>
+        <p:spPr>
+          <a:xfrm>
+            <a:off x="2788920" y="2514600"/>
+            <a:ext cx="1508760" cy="548640"/>
+          </a:xfrm>
+          <a:prstGeom prst="rect">
+            <a:avLst/>
+          </a:prstGeom>
+          <a:noFill/>
+          <a:ln/>
+        </p:spPr>
+        <p:txBody>
+          <a:bodyPr wrap="square" lIns="0" tIns="0" rIns="0" bIns="0" rtlCol="0" anchor="t"/>
+          <a:lstStyle/>
+          <a:p>
+            <a:pPr indent="0" marL="0">
+              <a:buNone/>
+            </a:pPr>
+            <a:r>
+              <a:rPr lang="en-US" sz="1600" b="1" dirty="0">
+                <a:solidFill>
+                  <a:srgbClr val="2F3E4E"/>
+                </a:solidFill>
+                <a:latin typeface="Calibri" pitchFamily="34" charset="0"/>
+                <a:ea typeface="Calibri" pitchFamily="34" charset="-122"/>
+                <a:cs typeface="Calibri" pitchFamily="34" charset="-120"/>
+              </a:rPr>
+              <a:t>10 · Pitágoras</a:t>
+            </a:r>
+            <a:endParaRPr lang="en-US" sz="1600" dirty="0"/>
+          </a:p>
+        </p:txBody>
+      </p:sp>
+      <p:sp>
+        <p:nvSpPr>
+          <p:cNvPr id="14" name="Text 10"/>
+          <p:cNvSpPr txBox="1"/>
+          <p:nvPr/>
+        </p:nvSpPr>
+        <p:spPr>
+          <a:xfrm>
+            <a:off x="2788920" y="3108960"/>
+            <a:ext cx="1508760" cy="868680"/>
+          </a:xfrm>
+          <a:prstGeom prst="rect">
+            <a:avLst/>
+          </a:prstGeom>
+          <a:noFill/>
+          <a:ln/>
+        </p:spPr>
+        <p:txBody>
+          <a:bodyPr wrap="square" lIns="0" tIns="0" rIns="0" bIns="0" rtlCol="0" anchor="t"/>
+          <a:lstStyle/>
+          <a:p>
+            <a:pPr indent="0" marL="0">
+              <a:buNone/>
+            </a:pPr>
+            <a:r>
+              <a:rPr lang="en-US" sz="1300" dirty="0">
+                <a:solidFill>
+                  <a:srgbClr val="2F3E4E"/>
+                </a:solidFill>
+                <a:latin typeface="Calibri" pitchFamily="34" charset="0"/>
+                <a:ea typeface="Calibri" pitchFamily="34" charset="-122"/>
+                <a:cs typeface="Calibri" pitchFamily="34" charset="-120"/>
+              </a:rPr>
+              <a:t>Lados de un triángulo rectángulo y distancias.</a:t>
+            </a:r>
+            <a:endParaRPr lang="en-US" sz="1300" dirty="0"/>
+          </a:p>
+        </p:txBody>
+      </p:sp>
+      <p:sp>
+        <p:nvSpPr>
+          <p:cNvPr id="15" name="Shape 11"/>
+          <p:cNvSpPr/>
+          <p:nvPr/>
+        </p:nvSpPr>
+        <p:spPr>
+          <a:xfrm>
+            <a:off x="4663440" y="1645920"/>
+            <a:ext cx="1874520" cy="2377440"/>
+          </a:xfrm>
+          <a:prstGeom prst="roundRect">
+            <a:avLst>
+              <a:gd name="adj" fmla="val 5854"/>
+            </a:avLst>
+          </a:prstGeom>
+          <a:solidFill>
+            <a:srgbClr val="FBEADC"/>
+          </a:solidFill>
+          <a:ln w="12700">
+            <a:solidFill>
+              <a:srgbClr val="FBEADC"/>
+            </a:solidFill>
+            <a:prstDash val="solid"/>
+          </a:ln>
+        </p:spPr>
+      </p:sp>
+      <p:sp>
+        <p:nvSpPr>
+          <p:cNvPr id="16" name="Shape 12"/>
+          <p:cNvSpPr/>
+          <p:nvPr/>
+        </p:nvSpPr>
+        <p:spPr>
+          <a:xfrm>
+            <a:off x="4846320" y="1828800"/>
+            <a:ext cx="548640" cy="548640"/>
+          </a:xfrm>
+          <a:prstGeom prst="ellipse">
+            <a:avLst/>
+          </a:prstGeom>
+          <a:solidFill>
+            <a:srgbClr val="E39B6B"/>
+          </a:solidFill>
+          <a:ln w="12700">
+            <a:solidFill>
+              <a:srgbClr val="E39B6B"/>
+            </a:solidFill>
+            <a:prstDash val="solid"/>
+          </a:ln>
+        </p:spPr>
+      </p:sp>
+      <p:pic>
+        <p:nvPicPr>
+          <p:cNvPr id="17" name="Image 2" descr="preencoded.png">    </p:cNvPr>
+          <p:cNvPicPr>
+            <a:picLocks noChangeAspect="1"/>
+          </p:cNvPicPr>
+          <p:nvPr/>
+        </p:nvPicPr>
+        <p:blipFill>
+          <a:blip r:embed="rId3"/>
+          <a:stretch>
+            <a:fillRect/>
+          </a:stretch>
+        </p:blipFill>
+        <p:spPr>
+          <a:xfrm>
+            <a:off x="4994453" y="1976933"/>
+            <a:ext cx="252374" cy="252374"/>
+          </a:xfrm>
+          <a:prstGeom prst="rect">
+            <a:avLst/>
+          </a:prstGeom>
+        </p:spPr>
+      </p:pic>
+      <p:sp>
+        <p:nvSpPr>
+          <p:cNvPr id="18" name="Text 13"/>
+          <p:cNvSpPr txBox="1"/>
+          <p:nvPr/>
+        </p:nvSpPr>
+        <p:spPr>
+          <a:xfrm>
+            <a:off x="4846320" y="2514600"/>
+            <a:ext cx="1508760" cy="548640"/>
+          </a:xfrm>
+          <a:prstGeom prst="rect">
+            <a:avLst/>
+          </a:prstGeom>
+          <a:noFill/>
+          <a:ln/>
+        </p:spPr>
+        <p:txBody>
+          <a:bodyPr wrap="square" lIns="0" tIns="0" rIns="0" bIns="0" rtlCol="0" anchor="t"/>
+          <a:lstStyle/>
+          <a:p>
+            <a:pPr indent="0" marL="0">
+              <a:buNone/>
+            </a:pPr>
+            <a:r>
+              <a:rPr lang="en-US" sz="1600" b="1" dirty="0">
+                <a:solidFill>
+                  <a:srgbClr val="2F3E4E"/>
+                </a:solidFill>
+                <a:latin typeface="Calibri" pitchFamily="34" charset="0"/>
+                <a:ea typeface="Calibri" pitchFamily="34" charset="-122"/>
+                <a:cs typeface="Calibri" pitchFamily="34" charset="-120"/>
+              </a:rPr>
+              <a:t>11 · Trigonometría</a:t>
+            </a:r>
+            <a:endParaRPr lang="en-US" sz="1600" dirty="0"/>
+          </a:p>
+        </p:txBody>
+      </p:sp>
+      <p:sp>
+        <p:nvSpPr>
+          <p:cNvPr id="19" name="Text 14"/>
+          <p:cNvSpPr txBox="1"/>
+          <p:nvPr/>
+        </p:nvSpPr>
+        <p:spPr>
+          <a:xfrm>
+            <a:off x="4846320" y="3108960"/>
+            <a:ext cx="1508760" cy="868680"/>
+          </a:xfrm>
+          <a:prstGeom prst="rect">
+            <a:avLst/>
+          </a:prstGeom>
+          <a:noFill/>
+          <a:ln/>
+        </p:spPr>
+        <p:txBody>
+          <a:bodyPr wrap="square" lIns="0" tIns="0" rIns="0" bIns="0" rtlCol="0" anchor="t"/>
+          <a:lstStyle/>
+          <a:p>
+            <a:pPr indent="0" marL="0">
+              <a:buNone/>
+            </a:pPr>
+            <a:r>
+              <a:rPr lang="en-US" sz="1300" dirty="0">
+                <a:solidFill>
+                  <a:srgbClr val="2F3E4E"/>
+                </a:solidFill>
+                <a:latin typeface="Calibri" pitchFamily="34" charset="0"/>
+                <a:ea typeface="Calibri" pitchFamily="34" charset="-122"/>
+                <a:cs typeface="Calibri" pitchFamily="34" charset="-120"/>
+              </a:rPr>
+              <a:t>Razones entre lados y ángulos.</a:t>
+            </a:r>
+            <a:endParaRPr lang="en-US" sz="1300" dirty="0"/>
+          </a:p>
+        </p:txBody>
+      </p:sp>
+      <p:sp>
+        <p:nvSpPr>
+          <p:cNvPr id="20" name="Shape 15"/>
+          <p:cNvSpPr/>
+          <p:nvPr/>
+        </p:nvSpPr>
+        <p:spPr>
+          <a:xfrm>
+            <a:off x="6720840" y="1645920"/>
+            <a:ext cx="1874520" cy="2377440"/>
+          </a:xfrm>
+          <a:prstGeom prst="roundRect">
+            <a:avLst>
+              <a:gd name="adj" fmla="val 5854"/>
+            </a:avLst>
+          </a:prstGeom>
+          <a:solidFill>
+            <a:srgbClr val="ECE8F6"/>
+          </a:solidFill>
+          <a:ln w="12700">
+            <a:solidFill>
+              <a:srgbClr val="ECE8F6"/>
+            </a:solidFill>
+            <a:prstDash val="solid"/>
+          </a:ln>
+        </p:spPr>
+      </p:sp>
+      <p:sp>
+        <p:nvSpPr>
+          <p:cNvPr id="21" name="Shape 16"/>
+          <p:cNvSpPr/>
+          <p:nvPr/>
+        </p:nvSpPr>
+        <p:spPr>
+          <a:xfrm>
+            <a:off x="6903720" y="1828800"/>
+            <a:ext cx="548640" cy="548640"/>
+          </a:xfrm>
+          <a:prstGeom prst="ellipse">
+            <a:avLst/>
+          </a:prstGeom>
+          <a:solidFill>
+            <a:srgbClr val="8E7FBF"/>
+          </a:solidFill>
+          <a:ln w="12700">
+            <a:solidFill>
+              <a:srgbClr val="8E7FBF"/>
+            </a:solidFill>
+            <a:prstDash val="solid"/>
+          </a:ln>
+        </p:spPr>
+      </p:sp>
+      <p:pic>
+        <p:nvPicPr>
+          <p:cNvPr id="22" name="Image 3" descr="preencoded.png">    </p:cNvPr>
+          <p:cNvPicPr>
+            <a:picLocks noChangeAspect="1"/>
+          </p:cNvPicPr>
+          <p:nvPr/>
+        </p:nvPicPr>
+        <p:blipFill>
+          <a:blip r:embed="rId4"/>
+          <a:stretch>
+            <a:fillRect/>
+          </a:stretch>
+        </p:blipFill>
+        <p:spPr>
+          <a:xfrm>
+            <a:off x="7051853" y="1976933"/>
+            <a:ext cx="252374" cy="252374"/>
+          </a:xfrm>
+          <a:prstGeom prst="rect">
+            <a:avLst/>
+          </a:prstGeom>
+        </p:spPr>
+      </p:pic>
+      <p:sp>
+        <p:nvSpPr>
+          <p:cNvPr id="23" name="Text 17"/>
+          <p:cNvSpPr txBox="1"/>
+          <p:nvPr/>
+        </p:nvSpPr>
+        <p:spPr>
+          <a:xfrm>
+            <a:off x="6903720" y="2514600"/>
+            <a:ext cx="1508760" cy="548640"/>
+          </a:xfrm>
+          <a:prstGeom prst="rect">
+            <a:avLst/>
+          </a:prstGeom>
+          <a:noFill/>
+          <a:ln/>
+        </p:spPr>
+        <p:txBody>
+          <a:bodyPr wrap="square" lIns="0" tIns="0" rIns="0" bIns="0" rtlCol="0" anchor="t"/>
+          <a:lstStyle/>
+          <a:p>
+            <a:pPr indent="0" marL="0">
+              <a:buNone/>
+            </a:pPr>
+            <a:r>
+              <a:rPr lang="en-US" sz="1600" b="1" dirty="0">
+                <a:solidFill>
+                  <a:srgbClr val="2F3E4E"/>
+                </a:solidFill>
+                <a:latin typeface="Calibri" pitchFamily="34" charset="0"/>
+                <a:ea typeface="Calibri" pitchFamily="34" charset="-122"/>
+                <a:cs typeface="Calibri" pitchFamily="34" charset="-120"/>
+              </a:rPr>
+              <a:t>12 · Patrones</a:t>
+            </a:r>
+            <a:endParaRPr lang="en-US" sz="1600" dirty="0"/>
+          </a:p>
+        </p:txBody>
+      </p:sp>
+      <p:sp>
+        <p:nvSpPr>
+          <p:cNvPr id="24" name="Text 18"/>
+          <p:cNvSpPr txBox="1"/>
+          <p:nvPr/>
+        </p:nvSpPr>
+        <p:spPr>
+          <a:xfrm>
+            <a:off x="6903720" y="3108960"/>
+            <a:ext cx="1508760" cy="868680"/>
+          </a:xfrm>
+          <a:prstGeom prst="rect">
+            <a:avLst/>
+          </a:prstGeom>
+          <a:noFill/>
+          <a:ln/>
+        </p:spPr>
+        <p:txBody>
+          <a:bodyPr wrap="square" lIns="0" tIns="0" rIns="0" bIns="0" rtlCol="0" anchor="t"/>
+          <a:lstStyle/>
+          <a:p>
+            <a:pPr indent="0" marL="0">
+              <a:buNone/>
+            </a:pPr>
+            <a:r>
+              <a:rPr lang="en-US" sz="1300" dirty="0">
+                <a:solidFill>
+                  <a:srgbClr val="2F3E4E"/>
+                </a:solidFill>
+                <a:latin typeface="Calibri" pitchFamily="34" charset="0"/>
+                <a:ea typeface="Calibri" pitchFamily="34" charset="-122"/>
+                <a:cs typeface="Calibri" pitchFamily="34" charset="-120"/>
+              </a:rPr>
+              <a:t>Progresiones y sumas acumuladas.</a:t>
+            </a:r>
+            <a:endParaRPr lang="en-US" sz="1300" dirty="0"/>
+          </a:p>
+        </p:txBody>
+      </p:sp>
+    </p:spTree>
+  </p:cSld>
+  <p:clrMapOvr>
+    <a:masterClrMapping/>
+  </p:clrMapOvr>
+</p:sld>
+</file>
+
+<file path=ppt/slides/slide20.xml><?xml version="1.0" encoding="utf-8"?>
+<p:sld xmlns:a="http://schemas.openxmlformats.org/drawingml/2006/main" xmlns:r="http://schemas.openxmlformats.org/officeDocument/2006/relationships" xmlns:p="http://schemas.openxmlformats.org/presentationml/2006/main">
+  <p:cSld name="Slide 20">
+    <p:bg>
+      <p:bgPr>
+        <a:solidFill>
+          <a:srgbClr val="FFFFFF"/>
+        </a:solidFill>
+      </p:bgPr>
+    </p:bg>
+    <p:spTree>
+      <p:nvGrpSpPr>
+        <p:cNvPr id="1" name=""/>
+        <p:cNvGrpSpPr/>
+        <p:nvPr/>
+      </p:nvGrpSpPr>
+      <p:grpSpPr>
+        <a:xfrm>
+          <a:off x="0" y="0"/>
+          <a:ext cx="0" cy="0"/>
+          <a:chOff x="0" y="0"/>
+          <a:chExt cx="0" cy="0"/>
+        </a:xfrm>
+      </p:grpSpPr>
+      <p:sp>
+        <p:nvSpPr>
+          <p:cNvPr id="2" name="Text 0"/>
+          <p:cNvSpPr txBox="1"/>
+          <p:nvPr/>
+        </p:nvSpPr>
+        <p:spPr>
+          <a:xfrm>
+            <a:off x="548640" y="320040"/>
+            <a:ext cx="8046720" cy="640080"/>
+          </a:xfrm>
+          <a:prstGeom prst="rect">
+            <a:avLst/>
+          </a:prstGeom>
+          <a:noFill/>
+          <a:ln/>
+        </p:spPr>
+        <p:txBody>
+          <a:bodyPr wrap="square" lIns="0" tIns="0" rIns="0" bIns="0" rtlCol="0" anchor="ctr"/>
+          <a:lstStyle/>
+          <a:p>
+            <a:pPr indent="0" marL="0">
+              <a:buNone/>
+            </a:pPr>
+            <a:r>
+              <a:rPr lang="en-US" sz="3000" b="1" dirty="0">
+                <a:solidFill>
+                  <a:srgbClr val="2F3E4E"/>
+                </a:solidFill>
+                <a:latin typeface="Cambria" pitchFamily="34" charset="0"/>
+                <a:ea typeface="Cambria" pitchFamily="34" charset="-122"/>
+                <a:cs typeface="Cambria" pitchFamily="34" charset="-120"/>
+              </a:rPr>
+              <a:t>Altura con sombras</a:t>
+            </a:r>
+            <a:endParaRPr lang="en-US" sz="3000" dirty="0"/>
+          </a:p>
+        </p:txBody>
+      </p:sp>
+      <p:sp>
+        <p:nvSpPr>
+          <p:cNvPr id="3" name="Text 1"/>
+          <p:cNvSpPr txBox="1"/>
+          <p:nvPr/>
+        </p:nvSpPr>
+        <p:spPr>
+          <a:xfrm>
+            <a:off x="548640" y="960120"/>
+            <a:ext cx="8046720" cy="365760"/>
+          </a:xfrm>
+          <a:prstGeom prst="rect">
+            <a:avLst/>
+          </a:prstGeom>
+          <a:noFill/>
+          <a:ln/>
+        </p:spPr>
+        <p:txBody>
+          <a:bodyPr wrap="square" lIns="0" tIns="0" rIns="0" bIns="0" rtlCol="0" anchor="ctr"/>
+          <a:lstStyle/>
+          <a:p>
+            <a:pPr indent="0" marL="0">
+              <a:buNone/>
+            </a:pPr>
+            <a:r>
+              <a:rPr lang="en-US" sz="1600" dirty="0">
+                <a:solidFill>
+                  <a:srgbClr val="5F6E80"/>
+                </a:solidFill>
+                <a:latin typeface="Calibri" pitchFamily="34" charset="0"/>
+                <a:ea typeface="Calibri" pitchFamily="34" charset="-122"/>
+                <a:cs typeface="Calibri" pitchFamily="34" charset="-120"/>
+              </a:rPr>
+              <a:t>Los rayos del sol son paralelos</a:t>
+            </a:r>
+            <a:endParaRPr lang="en-US" sz="1600" dirty="0"/>
+          </a:p>
+        </p:txBody>
+      </p:sp>
+      <p:sp>
+        <p:nvSpPr>
+          <p:cNvPr id="4" name="Text 2"/>
+          <p:cNvSpPr txBox="1"/>
+          <p:nvPr/>
+        </p:nvSpPr>
+        <p:spPr>
+          <a:xfrm>
+            <a:off x="548640" y="4754880"/>
+            <a:ext cx="8046720" cy="228600"/>
+          </a:xfrm>
+          <a:prstGeom prst="rect">
+            <a:avLst/>
+          </a:prstGeom>
+          <a:noFill/>
+          <a:ln/>
+        </p:spPr>
+        <p:txBody>
+          <a:bodyPr wrap="square" lIns="0" tIns="0" rIns="0" bIns="0" rtlCol="0" anchor="ctr"/>
+          <a:lstStyle/>
+          <a:p>
+            <a:pPr indent="0" marL="0">
+              <a:buNone/>
+            </a:pPr>
+            <a:r>
+              <a:rPr lang="en-US" sz="1000" dirty="0">
+                <a:solidFill>
+                  <a:srgbClr val="8A98A8"/>
+                </a:solidFill>
+                <a:latin typeface="Calibri" pitchFamily="34" charset="0"/>
+                <a:ea typeface="Calibri" pitchFamily="34" charset="-122"/>
+                <a:cs typeface="Calibri" pitchFamily="34" charset="-120"/>
+              </a:rPr>
+              <a:t>Club de programación Competitiva - BugSquad 2026</a:t>
+            </a:r>
+            <a:endParaRPr lang="en-US" sz="1000" dirty="0"/>
+          </a:p>
+        </p:txBody>
+      </p:sp>
+      <p:sp>
+        <p:nvSpPr>
+          <p:cNvPr id="5" name="Shape 3"/>
+          <p:cNvSpPr/>
+          <p:nvPr/>
+        </p:nvSpPr>
+        <p:spPr>
+          <a:xfrm>
+            <a:off x="731520" y="1737360"/>
+            <a:ext cx="7680960" cy="1005840"/>
+          </a:xfrm>
+          <a:prstGeom prst="roundRect">
+            <a:avLst>
+              <a:gd name="adj" fmla="val 10909"/>
+            </a:avLst>
+          </a:prstGeom>
+          <a:solidFill>
+            <a:srgbClr val="E1F0E7"/>
+          </a:solidFill>
+          <a:ln w="12700">
+            <a:solidFill>
+              <a:srgbClr val="E1F0E7"/>
+            </a:solidFill>
+            <a:prstDash val="solid"/>
+          </a:ln>
+        </p:spPr>
+      </p:sp>
+      <p:sp>
+        <p:nvSpPr>
+          <p:cNvPr id="6" name="Text 4"/>
+          <p:cNvSpPr txBox="1"/>
+          <p:nvPr/>
+        </p:nvSpPr>
+        <p:spPr>
+          <a:xfrm>
+            <a:off x="731520" y="1737360"/>
+            <a:ext cx="7680960" cy="1005840"/>
+          </a:xfrm>
+          <a:prstGeom prst="rect">
+            <a:avLst/>
+          </a:prstGeom>
+          <a:noFill/>
+          <a:ln/>
+        </p:spPr>
+        <p:txBody>
+          <a:bodyPr wrap="square" lIns="0" tIns="0" rIns="0" bIns="0" rtlCol="0" anchor="ctr"/>
+          <a:lstStyle/>
+          <a:p>
+            <a:pPr algn="ctr" indent="0" marL="0">
+              <a:buNone/>
+            </a:pPr>
+            <a:r>
+              <a:rPr lang="en-US" sz="2200" b="1" dirty="0">
+                <a:solidFill>
+                  <a:srgbClr val="2F3E4E"/>
+                </a:solidFill>
+                <a:latin typeface="Calibri" pitchFamily="34" charset="0"/>
+                <a:ea typeface="Calibri" pitchFamily="34" charset="-122"/>
+                <a:cs typeface="Calibri" pitchFamily="34" charset="-120"/>
+              </a:rPr>
+              <a:t>H / 4.0 = 1.70 / 0.85 = 2   ⇒   H = 8.0 m</a:t>
+            </a:r>
+            <a:endParaRPr lang="en-US" sz="2200" dirty="0"/>
+          </a:p>
+        </p:txBody>
+      </p:sp>
+      <p:sp>
+        <p:nvSpPr>
+          <p:cNvPr id="7" name="Text 5"/>
+          <p:cNvSpPr txBox="1"/>
+          <p:nvPr/>
+        </p:nvSpPr>
+        <p:spPr>
+          <a:xfrm>
+            <a:off x="548640" y="3017520"/>
+            <a:ext cx="8046720" cy="1463040"/>
+          </a:xfrm>
+          <a:prstGeom prst="rect">
+            <a:avLst/>
+          </a:prstGeom>
+          <a:noFill/>
+          <a:ln/>
+        </p:spPr>
+        <p:txBody>
+          <a:bodyPr wrap="square" lIns="0" tIns="0" rIns="0" bIns="0" rtlCol="0" anchor="t"/>
+          <a:lstStyle/>
+          <a:p>
+            <a:pPr marL="342900" indent="-342900">
+              <a:spcAft>
+                <a:spcPts val="600"/>
+              </a:spcAft>
+              <a:buSzPct val="100000"/>
+              <a:buChar char="•"/>
+            </a:pPr>
+            <a:r>
+              <a:rPr lang="en-US" sz="1700" dirty="0">
+                <a:solidFill>
+                  <a:srgbClr val="2F3E4E"/>
+                </a:solidFill>
+                <a:latin typeface="Calibri" pitchFamily="34" charset="0"/>
+                <a:ea typeface="Calibri" pitchFamily="34" charset="-122"/>
+                <a:cs typeface="Calibri" pitchFamily="34" charset="-120"/>
+              </a:rPr>
+              <a:t>Persona de 1.70 m con sombra de 0.85 m.</a:t>
+            </a:r>
+            <a:endParaRPr lang="en-US" sz="1700" dirty="0"/>
+          </a:p>
+          <a:p>
+            <a:pPr marL="342900" indent="-342900">
+              <a:spcAft>
+                <a:spcPts val="600"/>
+              </a:spcAft>
+              <a:buSzPct val="100000"/>
+              <a:buChar char="•"/>
+            </a:pPr>
+            <a:r>
+              <a:rPr lang="en-US" sz="1700" dirty="0">
+                <a:solidFill>
+                  <a:srgbClr val="2F3E4E"/>
+                </a:solidFill>
+                <a:latin typeface="Calibri" pitchFamily="34" charset="0"/>
+                <a:ea typeface="Calibri" pitchFamily="34" charset="-122"/>
+                <a:cs typeface="Calibri" pitchFamily="34" charset="-120"/>
+              </a:rPr>
+              <a:t>Poste con sombra de 4.0 m: su altura es 8.0 m.</a:t>
+            </a:r>
+            <a:endParaRPr lang="en-US" sz="1700" dirty="0"/>
+          </a:p>
+          <a:p>
+            <a:pPr marL="342900" indent="-342900">
+              <a:spcAft>
+                <a:spcPts val="600"/>
+              </a:spcAft>
+              <a:buSzPct val="100000"/>
+              <a:buChar char="•"/>
+            </a:pPr>
+            <a:r>
+              <a:rPr lang="en-US" sz="1700" dirty="0">
+                <a:solidFill>
+                  <a:srgbClr val="2F3E4E"/>
+                </a:solidFill>
+                <a:latin typeface="Calibri" pitchFamily="34" charset="0"/>
+                <a:ea typeface="Calibri" pitchFamily="34" charset="-122"/>
+                <a:cs typeface="Calibri" pitchFamily="34" charset="-120"/>
+              </a:rPr>
+              <a:t>Los dos triángulos son semejantes por el criterio AA.</a:t>
+            </a:r>
+            <a:endParaRPr lang="en-US" sz="1700" dirty="0"/>
+          </a:p>
+        </p:txBody>
+      </p:sp>
+    </p:spTree>
+  </p:cSld>
+  <p:clrMapOvr>
+    <a:masterClrMapping/>
+  </p:clrMapOvr>
+</p:sld>
+</file>
+
+<file path=ppt/slides/slide21.xml><?xml version="1.0" encoding="utf-8"?>
+<p:sld xmlns:a="http://schemas.openxmlformats.org/drawingml/2006/main" xmlns:r="http://schemas.openxmlformats.org/officeDocument/2006/relationships" xmlns:p="http://schemas.openxmlformats.org/presentationml/2006/main">
+  <p:cSld name="Slide 21">
+    <p:bg>
+      <p:bgPr>
+        <a:solidFill>
+          <a:srgbClr val="FFFFFF"/>
+        </a:solidFill>
+      </p:bgPr>
+    </p:bg>
+    <p:spTree>
+      <p:nvGrpSpPr>
+        <p:cNvPr id="1" name=""/>
+        <p:cNvGrpSpPr/>
+        <p:nvPr/>
+      </p:nvGrpSpPr>
+      <p:grpSpPr>
+        <a:xfrm>
+          <a:off x="0" y="0"/>
+          <a:ext cx="0" cy="0"/>
+          <a:chOff x="0" y="0"/>
+          <a:chExt cx="0" cy="0"/>
+        </a:xfrm>
+      </p:grpSpPr>
+      <p:sp>
+        <p:nvSpPr>
+          <p:cNvPr id="2" name="Text 0"/>
+          <p:cNvSpPr txBox="1"/>
+          <p:nvPr/>
+        </p:nvSpPr>
+        <p:spPr>
+          <a:xfrm>
+            <a:off x="548640" y="320040"/>
+            <a:ext cx="8046720" cy="640080"/>
+          </a:xfrm>
+          <a:prstGeom prst="rect">
+            <a:avLst/>
+          </a:prstGeom>
+          <a:noFill/>
+          <a:ln/>
+        </p:spPr>
+        <p:txBody>
+          <a:bodyPr wrap="square" lIns="0" tIns="0" rIns="0" bIns="0" rtlCol="0" anchor="ctr"/>
+          <a:lstStyle/>
+          <a:p>
+            <a:pPr indent="0" marL="0">
+              <a:buNone/>
+            </a:pPr>
+            <a:r>
+              <a:rPr lang="en-US" sz="3000" b="1" dirty="0">
+                <a:solidFill>
+                  <a:srgbClr val="2F3E4E"/>
+                </a:solidFill>
+                <a:latin typeface="Cambria" pitchFamily="34" charset="0"/>
+                <a:ea typeface="Cambria" pitchFamily="34" charset="-122"/>
+                <a:cs typeface="Cambria" pitchFamily="34" charset="-120"/>
+              </a:rPr>
+              <a:t>Errores frecuentes: proporción</a:t>
+            </a:r>
+            <a:endParaRPr lang="en-US" sz="3000" dirty="0"/>
+          </a:p>
+        </p:txBody>
+      </p:sp>
+      <p:sp>
+        <p:nvSpPr>
+          <p:cNvPr id="3" name="Text 1"/>
+          <p:cNvSpPr txBox="1"/>
+          <p:nvPr/>
+        </p:nvSpPr>
+        <p:spPr>
+          <a:xfrm>
+            <a:off x="548640" y="960120"/>
+            <a:ext cx="8046720" cy="365760"/>
+          </a:xfrm>
+          <a:prstGeom prst="rect">
+            <a:avLst/>
+          </a:prstGeom>
+          <a:noFill/>
+          <a:ln/>
+        </p:spPr>
+        <p:txBody>
+          <a:bodyPr wrap="square" lIns="0" tIns="0" rIns="0" bIns="0" rtlCol="0" anchor="ctr"/>
+          <a:lstStyle/>
+          <a:p>
+            <a:pPr indent="0" marL="0">
+              <a:buNone/>
+            </a:pPr>
+            <a:r>
+              <a:rPr lang="en-US" sz="1600" dirty="0">
+                <a:solidFill>
+                  <a:srgbClr val="5F6E80"/>
+                </a:solidFill>
+                <a:latin typeface="Calibri" pitchFamily="34" charset="0"/>
+                <a:ea typeface="Calibri" pitchFamily="34" charset="-122"/>
+                <a:cs typeface="Calibri" pitchFamily="34" charset="-120"/>
+              </a:rPr>
+              <a:t>Revísalos antes de la tarea</a:t>
+            </a:r>
+            <a:endParaRPr lang="en-US" sz="1600" dirty="0"/>
+          </a:p>
+        </p:txBody>
+      </p:sp>
+      <p:sp>
+        <p:nvSpPr>
+          <p:cNvPr id="4" name="Text 2"/>
+          <p:cNvSpPr txBox="1"/>
+          <p:nvPr/>
+        </p:nvSpPr>
+        <p:spPr>
+          <a:xfrm>
+            <a:off x="548640" y="4754880"/>
+            <a:ext cx="8046720" cy="228600"/>
+          </a:xfrm>
+          <a:prstGeom prst="rect">
+            <a:avLst/>
+          </a:prstGeom>
+          <a:noFill/>
+          <a:ln/>
+        </p:spPr>
+        <p:txBody>
+          <a:bodyPr wrap="square" lIns="0" tIns="0" rIns="0" bIns="0" rtlCol="0" anchor="ctr"/>
+          <a:lstStyle/>
+          <a:p>
+            <a:pPr indent="0" marL="0">
+              <a:buNone/>
+            </a:pPr>
+            <a:r>
+              <a:rPr lang="en-US" sz="1000" dirty="0">
+                <a:solidFill>
+                  <a:srgbClr val="8A98A8"/>
+                </a:solidFill>
+                <a:latin typeface="Calibri" pitchFamily="34" charset="0"/>
+                <a:ea typeface="Calibri" pitchFamily="34" charset="-122"/>
+                <a:cs typeface="Calibri" pitchFamily="34" charset="-120"/>
+              </a:rPr>
+              <a:t>Club de programación Competitiva - BugSquad 2026</a:t>
+            </a:r>
+            <a:endParaRPr lang="en-US" sz="1000" dirty="0"/>
+          </a:p>
+        </p:txBody>
+      </p:sp>
+      <p:sp>
+        <p:nvSpPr>
+          <p:cNvPr id="5" name="Text 3"/>
+          <p:cNvSpPr txBox="1"/>
+          <p:nvPr/>
+        </p:nvSpPr>
+        <p:spPr>
+          <a:xfrm>
+            <a:off x="548640" y="1645920"/>
+            <a:ext cx="8046720" cy="2560320"/>
+          </a:xfrm>
+          <a:prstGeom prst="rect">
+            <a:avLst/>
+          </a:prstGeom>
+          <a:noFill/>
+          <a:ln/>
+        </p:spPr>
+        <p:txBody>
+          <a:bodyPr wrap="square" lIns="0" tIns="0" rIns="0" bIns="0" rtlCol="0" anchor="t"/>
+          <a:lstStyle/>
+          <a:p>
+            <a:pPr marL="342900" indent="-342900">
+              <a:spcAft>
+                <a:spcPts val="600"/>
+              </a:spcAft>
+              <a:buSzPct val="100000"/>
+              <a:buChar char="•"/>
+            </a:pPr>
+            <a:r>
+              <a:rPr lang="en-US" sz="1800" dirty="0">
+                <a:solidFill>
+                  <a:srgbClr val="2F3E4E"/>
+                </a:solidFill>
+                <a:latin typeface="Calibri" pitchFamily="34" charset="0"/>
+                <a:ea typeface="Calibri" pitchFamily="34" charset="-122"/>
+                <a:cs typeface="Calibri" pitchFamily="34" charset="-120"/>
+              </a:rPr>
+              <a:t>Confundir lados correspondientes: deben oponerse a ángulos iguales.</a:t>
+            </a:r>
+            <a:endParaRPr lang="en-US" sz="1800" dirty="0"/>
+          </a:p>
+          <a:p>
+            <a:pPr marL="342900" indent="-342900">
+              <a:spcAft>
+                <a:spcPts val="600"/>
+              </a:spcAft>
+              <a:buSzPct val="100000"/>
+              <a:buChar char="•"/>
+            </a:pPr>
+            <a:r>
+              <a:rPr lang="en-US" sz="1800" dirty="0">
+                <a:solidFill>
+                  <a:srgbClr val="2F3E4E"/>
+                </a:solidFill>
+                <a:latin typeface="Calibri" pitchFamily="34" charset="0"/>
+                <a:ea typeface="Calibri" pitchFamily="34" charset="-122"/>
+                <a:cs typeface="Calibri" pitchFamily="34" charset="-120"/>
+              </a:rPr>
+              <a:t>Sumar en lugar de multiplicar: y = k · x es multiplicativa.</a:t>
+            </a:r>
+            <a:endParaRPr lang="en-US" sz="1800" dirty="0"/>
+          </a:p>
+          <a:p>
+            <a:pPr marL="342900" indent="-342900">
+              <a:spcAft>
+                <a:spcPts val="600"/>
+              </a:spcAft>
+              <a:buSzPct val="100000"/>
+              <a:buChar char="•"/>
+            </a:pPr>
+            <a:r>
+              <a:rPr lang="en-US" sz="1800" dirty="0">
+                <a:solidFill>
+                  <a:srgbClr val="2F3E4E"/>
+                </a:solidFill>
+                <a:latin typeface="Calibri" pitchFamily="34" charset="0"/>
+                <a:ea typeface="Calibri" pitchFamily="34" charset="-122"/>
+                <a:cs typeface="Calibri" pitchFamily="34" charset="-120"/>
+              </a:rPr>
+              <a:t>Olvidar que las rectas deben ser paralelas: sin paralelismo, Tales no se cumple.</a:t>
+            </a:r>
+            <a:endParaRPr lang="en-US" sz="1800" dirty="0"/>
+          </a:p>
+        </p:txBody>
+      </p:sp>
+    </p:spTree>
+  </p:cSld>
+  <p:clrMapOvr>
+    <a:masterClrMapping/>
+  </p:clrMapOvr>
+</p:sld>
+</file>
+
+<file path=ppt/slides/slide22.xml><?xml version="1.0" encoding="utf-8"?>
+<p:sld xmlns:a="http://schemas.openxmlformats.org/drawingml/2006/main" xmlns:r="http://schemas.openxmlformats.org/officeDocument/2006/relationships" xmlns:p="http://schemas.openxmlformats.org/presentationml/2006/main">
+  <p:cSld name="Slide 22">
+    <p:bg>
+      <p:bgPr>
+        <a:solidFill>
+          <a:srgbClr val="FFFFFF"/>
+        </a:solidFill>
+      </p:bgPr>
+    </p:bg>
+    <p:spTree>
+      <p:nvGrpSpPr>
+        <p:cNvPr id="1" name=""/>
+        <p:cNvGrpSpPr/>
+        <p:nvPr/>
+      </p:nvGrpSpPr>
+      <p:grpSpPr>
+        <a:xfrm>
+          <a:off x="0" y="0"/>
+          <a:ext cx="0" cy="0"/>
+          <a:chOff x="0" y="0"/>
+          <a:chExt cx="0" cy="0"/>
+        </a:xfrm>
+      </p:grpSpPr>
+      <p:sp>
+        <p:nvSpPr>
+          <p:cNvPr id="2" name="Text 0"/>
+          <p:cNvSpPr txBox="1"/>
+          <p:nvPr/>
+        </p:nvSpPr>
+        <p:spPr>
+          <a:xfrm>
+            <a:off x="548640" y="320040"/>
+            <a:ext cx="8046720" cy="640080"/>
+          </a:xfrm>
+          <a:prstGeom prst="rect">
+            <a:avLst/>
+          </a:prstGeom>
+          <a:noFill/>
+          <a:ln/>
+        </p:spPr>
+        <p:txBody>
+          <a:bodyPr wrap="square" lIns="0" tIns="0" rIns="0" bIns="0" rtlCol="0" anchor="ctr"/>
+          <a:lstStyle/>
+          <a:p>
+            <a:pPr indent="0" marL="0">
+              <a:buNone/>
+            </a:pPr>
+            <a:r>
+              <a:rPr lang="en-US" sz="3000" b="1" dirty="0">
+                <a:solidFill>
+                  <a:srgbClr val="2F3E4E"/>
+                </a:solidFill>
+                <a:latin typeface="Cambria" pitchFamily="34" charset="0"/>
+                <a:ea typeface="Cambria" pitchFamily="34" charset="-122"/>
+                <a:cs typeface="Cambria" pitchFamily="34" charset="-120"/>
+              </a:rPr>
+              <a:t>Errores frecuentes</a:t>
+            </a:r>
+            <a:endParaRPr lang="en-US" sz="3000" dirty="0"/>
+          </a:p>
+        </p:txBody>
+      </p:sp>
+      <p:sp>
+        <p:nvSpPr>
+          <p:cNvPr id="3" name="Text 1"/>
+          <p:cNvSpPr txBox="1"/>
+          <p:nvPr/>
+        </p:nvSpPr>
+        <p:spPr>
+          <a:xfrm>
+            <a:off x="548640" y="960120"/>
+            <a:ext cx="8046720" cy="365760"/>
+          </a:xfrm>
+          <a:prstGeom prst="rect">
+            <a:avLst/>
+          </a:prstGeom>
+          <a:noFill/>
+          <a:ln/>
+        </p:spPr>
+        <p:txBody>
+          <a:bodyPr wrap="square" lIns="0" tIns="0" rIns="0" bIns="0" rtlCol="0" anchor="ctr"/>
+          <a:lstStyle/>
+          <a:p>
+            <a:pPr indent="0" marL="0">
+              <a:buNone/>
+            </a:pPr>
+            <a:r>
+              <a:rPr lang="en-US" sz="1600" dirty="0">
+                <a:solidFill>
+                  <a:srgbClr val="5F6E80"/>
+                </a:solidFill>
+                <a:latin typeface="Calibri" pitchFamily="34" charset="0"/>
+                <a:ea typeface="Calibri" pitchFamily="34" charset="-122"/>
+                <a:cs typeface="Calibri" pitchFamily="34" charset="-120"/>
+              </a:rPr>
+              <a:t>Revísalos antes del examen</a:t>
+            </a:r>
+            <a:endParaRPr lang="en-US" sz="1600" dirty="0"/>
+          </a:p>
+        </p:txBody>
+      </p:sp>
+      <p:sp>
+        <p:nvSpPr>
+          <p:cNvPr id="4" name="Text 2"/>
+          <p:cNvSpPr txBox="1"/>
+          <p:nvPr/>
+        </p:nvSpPr>
+        <p:spPr>
+          <a:xfrm>
+            <a:off x="548640" y="4754880"/>
+            <a:ext cx="8046720" cy="228600"/>
+          </a:xfrm>
+          <a:prstGeom prst="rect">
+            <a:avLst/>
+          </a:prstGeom>
+          <a:noFill/>
+          <a:ln/>
+        </p:spPr>
+        <p:txBody>
+          <a:bodyPr wrap="square" lIns="0" tIns="0" rIns="0" bIns="0" rtlCol="0" anchor="ctr"/>
+          <a:lstStyle/>
+          <a:p>
+            <a:pPr indent="0" marL="0">
+              <a:buNone/>
+            </a:pPr>
+            <a:r>
+              <a:rPr lang="en-US" sz="1000" dirty="0">
+                <a:solidFill>
+                  <a:srgbClr val="8A98A8"/>
+                </a:solidFill>
+                <a:latin typeface="Calibri" pitchFamily="34" charset="0"/>
+                <a:ea typeface="Calibri" pitchFamily="34" charset="-122"/>
+                <a:cs typeface="Calibri" pitchFamily="34" charset="-120"/>
+              </a:rPr>
+              <a:t>Club de programación Competitiva - BugSquad 2026</a:t>
+            </a:r>
+            <a:endParaRPr lang="en-US" sz="1000" dirty="0"/>
+          </a:p>
+        </p:txBody>
+      </p:sp>
+      <p:sp>
+        <p:nvSpPr>
+          <p:cNvPr id="5" name="Text 3"/>
+          <p:cNvSpPr txBox="1"/>
+          <p:nvPr/>
+        </p:nvSpPr>
+        <p:spPr>
+          <a:xfrm>
+            <a:off x="548640" y="1645920"/>
+            <a:ext cx="8046720" cy="2926080"/>
+          </a:xfrm>
+          <a:prstGeom prst="rect">
+            <a:avLst/>
+          </a:prstGeom>
+          <a:noFill/>
+          <a:ln/>
+        </p:spPr>
+        <p:txBody>
+          <a:bodyPr wrap="square" lIns="0" tIns="0" rIns="0" bIns="0" rtlCol="0" anchor="t"/>
+          <a:lstStyle/>
+          <a:p>
+            <a:pPr marL="342900" indent="-342900">
+              <a:spcAft>
+                <a:spcPts val="600"/>
+              </a:spcAft>
+              <a:buSzPct val="100000"/>
+              <a:buChar char="•"/>
+            </a:pPr>
+            <a:r>
+              <a:rPr lang="en-US" sz="1700" dirty="0">
+                <a:solidFill>
+                  <a:srgbClr val="2F3E4E"/>
+                </a:solidFill>
+                <a:latin typeface="Calibri" pitchFamily="34" charset="0"/>
+                <a:ea typeface="Calibri" pitchFamily="34" charset="-122"/>
+                <a:cs typeface="Calibri" pitchFamily="34" charset="-120"/>
+              </a:rPr>
+              <a:t>Confundir complementarios (90°) con suplementarios (180°).</a:t>
+            </a:r>
+            <a:endParaRPr lang="en-US" sz="1700" dirty="0"/>
+          </a:p>
+          <a:p>
+            <a:pPr marL="342900" indent="-342900">
+              <a:spcAft>
+                <a:spcPts val="600"/>
+              </a:spcAft>
+              <a:buSzPct val="100000"/>
+              <a:buChar char="•"/>
+            </a:pPr>
+            <a:r>
+              <a:rPr lang="en-US" sz="1700" dirty="0">
+                <a:solidFill>
+                  <a:srgbClr val="2F3E4E"/>
+                </a:solidFill>
+                <a:latin typeface="Calibri" pitchFamily="34" charset="0"/>
+                <a:ea typeface="Calibri" pitchFamily="34" charset="-122"/>
+                <a:cs typeface="Calibri" pitchFamily="34" charset="-120"/>
+              </a:rPr>
+              <a:t>Errores de signo en distancias: 3 − (−4) = 7, no −1.</a:t>
+            </a:r>
+            <a:endParaRPr lang="en-US" sz="1700" dirty="0"/>
+          </a:p>
+          <a:p>
+            <a:pPr marL="342900" indent="-342900">
+              <a:spcAft>
+                <a:spcPts val="600"/>
+              </a:spcAft>
+              <a:buSzPct val="100000"/>
+              <a:buChar char="•"/>
+            </a:pPr>
+            <a:r>
+              <a:rPr lang="en-US" sz="1700" dirty="0">
+                <a:solidFill>
+                  <a:srgbClr val="2F3E4E"/>
+                </a:solidFill>
+                <a:latin typeface="Calibri" pitchFamily="34" charset="0"/>
+                <a:ea typeface="Calibri" pitchFamily="34" charset="-122"/>
+                <a:cs typeface="Calibri" pitchFamily="34" charset="-120"/>
+              </a:rPr>
+              <a:t>Calculadora en radianes: revisa que sen(30) dé 0.5.</a:t>
+            </a:r>
+            <a:endParaRPr lang="en-US" sz="1700" dirty="0"/>
+          </a:p>
+          <a:p>
+            <a:pPr marL="342900" indent="-342900">
+              <a:spcAft>
+                <a:spcPts val="600"/>
+              </a:spcAft>
+              <a:buSzPct val="100000"/>
+              <a:buChar char="•"/>
+            </a:pPr>
+            <a:r>
+              <a:rPr lang="en-US" sz="1700" dirty="0">
+                <a:solidFill>
+                  <a:srgbClr val="2F3E4E"/>
+                </a:solidFill>
+                <a:latin typeface="Calibri" pitchFamily="34" charset="0"/>
+                <a:ea typeface="Calibri" pitchFamily="34" charset="-122"/>
+                <a:cs typeface="Calibri" pitchFamily="34" charset="-120"/>
+              </a:rPr>
+              <a:t>Intercambiar el cateto opuesto y el adyacente.</a:t>
+            </a:r>
+            <a:endParaRPr lang="en-US" sz="1700" dirty="0"/>
+          </a:p>
+          <a:p>
+            <a:pPr marL="342900" indent="-342900">
+              <a:spcAft>
+                <a:spcPts val="600"/>
+              </a:spcAft>
+              <a:buSzPct val="100000"/>
+              <a:buChar char="•"/>
+            </a:pPr>
+            <a:r>
+              <a:rPr lang="en-US" sz="1700" dirty="0">
+                <a:solidFill>
+                  <a:srgbClr val="2F3E4E"/>
+                </a:solidFill>
+                <a:latin typeface="Calibri" pitchFamily="34" charset="0"/>
+                <a:ea typeface="Calibri" pitchFamily="34" charset="-122"/>
+                <a:cs typeface="Calibri" pitchFamily="34" charset="-120"/>
+              </a:rPr>
+              <a:t>Confundir n (cantidad de términos) con a_n (último término).</a:t>
+            </a:r>
+            <a:endParaRPr lang="en-US" sz="1700" dirty="0"/>
+          </a:p>
+        </p:txBody>
+      </p:sp>
+    </p:spTree>
+  </p:cSld>
+  <p:clrMapOvr>
+    <a:masterClrMapping/>
+  </p:clrMapOvr>
+</p:sld>
+</file>
+
+<file path=ppt/slides/slide23.xml><?xml version="1.0" encoding="utf-8"?>
+<p:sld xmlns:a="http://schemas.openxmlformats.org/drawingml/2006/main" xmlns:r="http://schemas.openxmlformats.org/officeDocument/2006/relationships" xmlns:p="http://schemas.openxmlformats.org/presentationml/2006/main">
+  <p:cSld name="Slide 23">
+    <p:bg>
+      <p:bgPr>
+        <a:solidFill>
+          <a:srgbClr val="FFFFFF"/>
+        </a:solidFill>
+      </p:bgPr>
+    </p:bg>
+    <p:spTree>
+      <p:nvGrpSpPr>
+        <p:cNvPr id="1" name=""/>
+        <p:cNvGrpSpPr/>
+        <p:nvPr/>
+      </p:nvGrpSpPr>
+      <p:grpSpPr>
+        <a:xfrm>
+          <a:off x="0" y="0"/>
+          <a:ext cx="0" cy="0"/>
+          <a:chOff x="0" y="0"/>
+          <a:chExt cx="0" cy="0"/>
+        </a:xfrm>
+      </p:grpSpPr>
+      <p:sp>
+        <p:nvSpPr>
+          <p:cNvPr id="2" name="Text 0"/>
+          <p:cNvSpPr txBox="1"/>
+          <p:nvPr/>
+        </p:nvSpPr>
+        <p:spPr>
+          <a:xfrm>
+            <a:off x="548640" y="320040"/>
+            <a:ext cx="8046720" cy="640080"/>
+          </a:xfrm>
+          <a:prstGeom prst="rect">
+            <a:avLst/>
+          </a:prstGeom>
+          <a:noFill/>
+          <a:ln/>
+        </p:spPr>
+        <p:txBody>
+          <a:bodyPr wrap="square" lIns="0" tIns="0" rIns="0" bIns="0" rtlCol="0" anchor="ctr"/>
+          <a:lstStyle/>
+          <a:p>
+            <a:pPr indent="0" marL="0">
+              <a:buNone/>
+            </a:pPr>
+            <a:r>
+              <a:rPr lang="en-US" sz="3000" b="1" dirty="0">
+                <a:solidFill>
+                  <a:srgbClr val="2F3E4E"/>
+                </a:solidFill>
+                <a:latin typeface="Cambria" pitchFamily="34" charset="0"/>
+                <a:ea typeface="Cambria" pitchFamily="34" charset="-122"/>
+                <a:cs typeface="Cambria" pitchFamily="34" charset="-120"/>
+              </a:rPr>
+              <a:t>Resumen de la clase</a:t>
+            </a:r>
+            <a:endParaRPr lang="en-US" sz="3000" dirty="0"/>
+          </a:p>
+        </p:txBody>
+      </p:sp>
+      <p:sp>
+        <p:nvSpPr>
+          <p:cNvPr id="3" name="Text 1"/>
+          <p:cNvSpPr txBox="1"/>
+          <p:nvPr/>
+        </p:nvSpPr>
+        <p:spPr>
+          <a:xfrm>
+            <a:off x="548640" y="960120"/>
+            <a:ext cx="8046720" cy="365760"/>
+          </a:xfrm>
+          <a:prstGeom prst="rect">
+            <a:avLst/>
+          </a:prstGeom>
+          <a:noFill/>
+          <a:ln/>
+        </p:spPr>
+        <p:txBody>
+          <a:bodyPr wrap="square" lIns="0" tIns="0" rIns="0" bIns="0" rtlCol="0" anchor="ctr"/>
+          <a:lstStyle/>
+          <a:p>
+            <a:pPr indent="0" marL="0">
+              <a:buNone/>
+            </a:pPr>
+            <a:r>
+              <a:rPr lang="en-US" sz="1600" dirty="0">
+                <a:solidFill>
+                  <a:srgbClr val="5F6E80"/>
+                </a:solidFill>
+                <a:latin typeface="Calibri" pitchFamily="34" charset="0"/>
+                <a:ea typeface="Calibri" pitchFamily="34" charset="-122"/>
+                <a:cs typeface="Calibri" pitchFamily="34" charset="-120"/>
+              </a:rPr>
+              <a:t>Ángulos, Pitágoras, trigonometría y patrones</a:t>
+            </a:r>
+            <a:endParaRPr lang="en-US" sz="1600" dirty="0"/>
+          </a:p>
+        </p:txBody>
+      </p:sp>
+      <p:sp>
+        <p:nvSpPr>
+          <p:cNvPr id="4" name="Text 2"/>
+          <p:cNvSpPr txBox="1"/>
+          <p:nvPr/>
+        </p:nvSpPr>
+        <p:spPr>
+          <a:xfrm>
+            <a:off x="548640" y="4754880"/>
+            <a:ext cx="8046720" cy="228600"/>
+          </a:xfrm>
+          <a:prstGeom prst="rect">
+            <a:avLst/>
+          </a:prstGeom>
+          <a:noFill/>
+          <a:ln/>
+        </p:spPr>
+        <p:txBody>
+          <a:bodyPr wrap="square" lIns="0" tIns="0" rIns="0" bIns="0" rtlCol="0" anchor="ctr"/>
+          <a:lstStyle/>
+          <a:p>
+            <a:pPr indent="0" marL="0">
+              <a:buNone/>
+            </a:pPr>
+            <a:r>
+              <a:rPr lang="en-US" sz="1000" dirty="0">
+                <a:solidFill>
+                  <a:srgbClr val="8A98A8"/>
+                </a:solidFill>
+                <a:latin typeface="Calibri" pitchFamily="34" charset="0"/>
+                <a:ea typeface="Calibri" pitchFamily="34" charset="-122"/>
+                <a:cs typeface="Calibri" pitchFamily="34" charset="-120"/>
+              </a:rPr>
+              <a:t>Club de programación Competitiva - BugSquad 2026</a:t>
+            </a:r>
+            <a:endParaRPr lang="en-US" sz="1000" dirty="0"/>
+          </a:p>
+        </p:txBody>
+      </p:sp>
       <p:graphicFrame>
         <p:nvGraphicFramePr>
-          <p:cNvPr id="16" name="Table 0"/>
+          <p:cNvPr id="24" name="Table 0"/>
           <p:cNvGraphicFramePr>
             <a:graphicFrameLocks noGrp="1"/>
           </p:cNvGraphicFramePr>
@@ -4994,775 +8759,148 @@
                   </a:tcPr>
                 </a:tc>
               </a:tr>
+              <a:tr h="411480">
+                <a:tc>
+                  <a:txBody>
+                    <a:bodyPr/>
+                    <a:lstStyle/>
+                    <a:p>
+                      <a:pPr algn="ctr" indent="0" marL="0">
+                        <a:buNone/>
+                      </a:pPr>
+                      <a:r>
+                        <a:rPr lang="en-US" sz="1400" dirty="0">
+                          <a:solidFill>
+                            <a:srgbClr val="2F3E4E"/>
+                          </a:solidFill>
+                          <a:latin typeface="Calibri" pitchFamily="34" charset="0"/>
+                          <a:ea typeface="Calibri" pitchFamily="34" charset="-122"/>
+                          <a:cs typeface="Calibri" pitchFamily="34" charset="-120"/>
+                        </a:rPr>
+                        <a:t>13 · Proporcionalidad</a:t>
+                      </a:r>
+                      <a:endParaRPr lang="en-US" sz="1400" dirty="0">
+                        <a:latin typeface="Calibri" charset="0"/>
+                        <a:ea typeface="Calibri" charset="0"/>
+                        <a:cs typeface="Calibri" charset="0"/>
+                      </a:endParaRPr>
+                    </a:p>
+                  </a:txBody>
+                  <a:tcPr marL="91440" marR="91440" marT="45720" marB="45720" anchor="ctr">
+                    <a:lnL w="9525" cap="flat" cmpd="sng" algn="ctr">
+                      <a:solidFill>
+                        <a:srgbClr val="C9D5E2"/>
+                      </a:solidFill>
+                      <a:prstDash val="solid"/>
+                      <a:round/>
+                      <a:headEnd type="none" w="med" len="med"/>
+                      <a:tailEnd type="none" w="med" len="med"/>
+                    </a:lnL>
+                    <a:lnR w="9525" cap="flat" cmpd="sng" algn="ctr">
+                      <a:solidFill>
+                        <a:srgbClr val="C9D5E2"/>
+                      </a:solidFill>
+                      <a:prstDash val="solid"/>
+                      <a:round/>
+                      <a:headEnd type="none" w="med" len="med"/>
+                      <a:tailEnd type="none" w="med" len="med"/>
+                    </a:lnR>
+                    <a:lnT w="9525" cap="flat" cmpd="sng" algn="ctr">
+                      <a:solidFill>
+                        <a:srgbClr val="C9D5E2"/>
+                      </a:solidFill>
+                      <a:prstDash val="solid"/>
+                      <a:round/>
+                      <a:headEnd type="none" w="med" len="med"/>
+                      <a:tailEnd type="none" w="med" len="med"/>
+                    </a:lnT>
+                    <a:lnB w="9525" cap="flat" cmpd="sng" algn="ctr">
+                      <a:solidFill>
+                        <a:srgbClr val="C9D5E2"/>
+                      </a:solidFill>
+                      <a:prstDash val="solid"/>
+                      <a:round/>
+                      <a:headEnd type="none" w="med" len="med"/>
+                      <a:tailEnd type="none" w="med" len="med"/>
+                    </a:lnB>
+                    <a:solidFill>
+                      <a:srgbClr val="EEF3F8"/>
+                    </a:solidFill>
+                  </a:tcPr>
+                </a:tc>
+                <a:tc>
+                  <a:txBody>
+                    <a:bodyPr/>
+                    <a:lstStyle/>
+                    <a:p>
+                      <a:pPr algn="ctr" indent="0" marL="0">
+                        <a:buNone/>
+                      </a:pPr>
+                      <a:r>
+                        <a:rPr lang="en-US" sz="1400" dirty="0">
+                          <a:solidFill>
+                            <a:srgbClr val="2F3E4E"/>
+                          </a:solidFill>
+                          <a:latin typeface="Calibri" pitchFamily="34" charset="0"/>
+                          <a:ea typeface="Calibri" pitchFamily="34" charset="-122"/>
+                          <a:cs typeface="Calibri" pitchFamily="34" charset="-120"/>
+                        </a:rPr>
+                        <a:t>a·d = b·c; y = k·x; criterio AA; AD/DB = AE/EC</a:t>
+                      </a:r>
+                      <a:endParaRPr lang="en-US" sz="1400" dirty="0">
+                        <a:latin typeface="Calibri" charset="0"/>
+                        <a:ea typeface="Calibri" charset="0"/>
+                        <a:cs typeface="Calibri" charset="0"/>
+                      </a:endParaRPr>
+                    </a:p>
+                  </a:txBody>
+                  <a:tcPr marL="91440" marR="91440" marT="45720" marB="45720" anchor="ctr">
+                    <a:lnL w="9525" cap="flat" cmpd="sng" algn="ctr">
+                      <a:solidFill>
+                        <a:srgbClr val="C9D5E2"/>
+                      </a:solidFill>
+                      <a:prstDash val="solid"/>
+                      <a:round/>
+                      <a:headEnd type="none" w="med" len="med"/>
+                      <a:tailEnd type="none" w="med" len="med"/>
+                    </a:lnL>
+                    <a:lnR w="9525" cap="flat" cmpd="sng" algn="ctr">
+                      <a:solidFill>
+                        <a:srgbClr val="C9D5E2"/>
+                      </a:solidFill>
+                      <a:prstDash val="solid"/>
+                      <a:round/>
+                      <a:headEnd type="none" w="med" len="med"/>
+                      <a:tailEnd type="none" w="med" len="med"/>
+                    </a:lnR>
+                    <a:lnT w="9525" cap="flat" cmpd="sng" algn="ctr">
+                      <a:solidFill>
+                        <a:srgbClr val="C9D5E2"/>
+                      </a:solidFill>
+                      <a:prstDash val="solid"/>
+                      <a:round/>
+                      <a:headEnd type="none" w="med" len="med"/>
+                      <a:tailEnd type="none" w="med" len="med"/>
+                    </a:lnT>
+                    <a:lnB w="9525" cap="flat" cmpd="sng" algn="ctr">
+                      <a:solidFill>
+                        <a:srgbClr val="C9D5E2"/>
+                      </a:solidFill>
+                      <a:prstDash val="solid"/>
+                      <a:round/>
+                      <a:headEnd type="none" w="med" len="med"/>
+                      <a:tailEnd type="none" w="med" len="med"/>
+                    </a:lnB>
+                    <a:solidFill>
+                      <a:srgbClr val="EEF3F8"/>
+                    </a:solidFill>
+                  </a:tcPr>
+                </a:tc>
+              </a:tr>
             </a:tbl>
           </a:graphicData>
         </a:graphic>
       </p:graphicFrame>
-    </p:spTree>
-  </p:cSld>
-  <p:clrMapOvr>
-    <a:masterClrMapping/>
-  </p:clrMapOvr>
-</p:sld>
-</file>
-
-<file path=ppt/slides/slide2.xml><?xml version="1.0" encoding="utf-8"?>
-<p:sld xmlns:a="http://schemas.openxmlformats.org/drawingml/2006/main" xmlns:r="http://schemas.openxmlformats.org/officeDocument/2006/relationships" xmlns:p="http://schemas.openxmlformats.org/presentationml/2006/main">
-  <p:cSld name="Slide 2">
-    <p:bg>
-      <p:bgPr>
-        <a:solidFill>
-          <a:srgbClr val="FFFFFF"/>
-        </a:solidFill>
-      </p:bgPr>
-    </p:bg>
-    <p:spTree>
-      <p:nvGrpSpPr>
-        <p:cNvPr id="1" name=""/>
-        <p:cNvGrpSpPr/>
-        <p:nvPr/>
-      </p:nvGrpSpPr>
-      <p:grpSpPr>
-        <a:xfrm>
-          <a:off x="0" y="0"/>
-          <a:ext cx="0" cy="0"/>
-          <a:chOff x="0" y="0"/>
-          <a:chExt cx="0" cy="0"/>
-        </a:xfrm>
-      </p:grpSpPr>
-      <p:sp>
-        <p:nvSpPr>
-          <p:cNvPr id="2" name="Text 0"/>
-          <p:cNvSpPr txBox="1"/>
-          <p:nvPr/>
-        </p:nvSpPr>
-        <p:spPr>
-          <a:xfrm>
-            <a:off x="548640" y="320040"/>
-            <a:ext cx="8046720" cy="640080"/>
-          </a:xfrm>
-          <a:prstGeom prst="rect">
-            <a:avLst/>
-          </a:prstGeom>
-          <a:noFill/>
-          <a:ln/>
-        </p:spPr>
-        <p:txBody>
-          <a:bodyPr wrap="square" lIns="0" tIns="0" rIns="0" bIns="0" rtlCol="0" anchor="ctr"/>
-          <a:lstStyle/>
-          <a:p>
-            <a:pPr indent="0" marL="0">
-              <a:buNone/>
-            </a:pPr>
-            <a:r>
-              <a:rPr lang="en-US" sz="3000" b="1" dirty="0">
-                <a:solidFill>
-                  <a:srgbClr val="2F3E4E"/>
-                </a:solidFill>
-                <a:latin typeface="Cambria" pitchFamily="34" charset="0"/>
-                <a:ea typeface="Cambria" pitchFamily="34" charset="-122"/>
-                <a:cs typeface="Cambria" pitchFamily="34" charset="-120"/>
-              </a:rPr>
-              <a:t>Medir figuras y distancias</a:t>
-            </a:r>
-            <a:endParaRPr lang="en-US" sz="3000" dirty="0"/>
-          </a:p>
-        </p:txBody>
-      </p:sp>
-      <p:sp>
-        <p:nvSpPr>
-          <p:cNvPr id="3" name="Text 1"/>
-          <p:cNvSpPr txBox="1"/>
-          <p:nvPr/>
-        </p:nvSpPr>
-        <p:spPr>
-          <a:xfrm>
-            <a:off x="548640" y="960120"/>
-            <a:ext cx="8046720" cy="365760"/>
-          </a:xfrm>
-          <a:prstGeom prst="rect">
-            <a:avLst/>
-          </a:prstGeom>
-          <a:noFill/>
-          <a:ln/>
-        </p:spPr>
-        <p:txBody>
-          <a:bodyPr wrap="square" lIns="0" tIns="0" rIns="0" bIns="0" rtlCol="0" anchor="ctr"/>
-          <a:lstStyle/>
-          <a:p>
-            <a:pPr indent="0" marL="0">
-              <a:buNone/>
-            </a:pPr>
-            <a:r>
-              <a:rPr lang="en-US" sz="1600" dirty="0">
-                <a:solidFill>
-                  <a:srgbClr val="5F6E80"/>
-                </a:solidFill>
-                <a:latin typeface="Calibri" pitchFamily="34" charset="0"/>
-                <a:ea typeface="Calibri" pitchFamily="34" charset="-122"/>
-                <a:cs typeface="Calibri" pitchFamily="34" charset="-120"/>
-              </a:rPr>
-              <a:t>Traducir formas y relaciones a números exactos</a:t>
-            </a:r>
-            <a:endParaRPr lang="en-US" sz="1600" dirty="0"/>
-          </a:p>
-        </p:txBody>
-      </p:sp>
-      <p:sp>
-        <p:nvSpPr>
-          <p:cNvPr id="4" name="Text 2"/>
-          <p:cNvSpPr txBox="1"/>
-          <p:nvPr/>
-        </p:nvSpPr>
-        <p:spPr>
-          <a:xfrm>
-            <a:off x="548640" y="4754880"/>
-            <a:ext cx="8046720" cy="228600"/>
-          </a:xfrm>
-          <a:prstGeom prst="rect">
-            <a:avLst/>
-          </a:prstGeom>
-          <a:noFill/>
-          <a:ln/>
-        </p:spPr>
-        <p:txBody>
-          <a:bodyPr wrap="square" lIns="0" tIns="0" rIns="0" bIns="0" rtlCol="0" anchor="ctr"/>
-          <a:lstStyle/>
-          <a:p>
-            <a:pPr indent="0" marL="0">
-              <a:buNone/>
-            </a:pPr>
-            <a:r>
-              <a:rPr lang="en-US" sz="1000" dirty="0">
-                <a:solidFill>
-                  <a:srgbClr val="8A98A8"/>
-                </a:solidFill>
-                <a:latin typeface="Calibri" pitchFamily="34" charset="0"/>
-                <a:ea typeface="Calibri" pitchFamily="34" charset="-122"/>
-                <a:cs typeface="Calibri" pitchFamily="34" charset="-120"/>
-              </a:rPr>
-              <a:t>Club de programación Competitiva - BugSquad 2026</a:t>
-            </a:r>
-            <a:endParaRPr lang="en-US" sz="1000" dirty="0"/>
-          </a:p>
-        </p:txBody>
-      </p:sp>
-      <p:sp>
-        <p:nvSpPr>
-          <p:cNvPr id="5" name="Shape 3"/>
-          <p:cNvSpPr/>
-          <p:nvPr/>
-        </p:nvSpPr>
-        <p:spPr>
-          <a:xfrm>
-            <a:off x="548640" y="1645920"/>
-            <a:ext cx="1874520" cy="2377440"/>
-          </a:xfrm>
-          <a:prstGeom prst="roundRect">
-            <a:avLst>
-              <a:gd name="adj" fmla="val 5854"/>
-            </a:avLst>
-          </a:prstGeom>
-          <a:solidFill>
-            <a:srgbClr val="DDE8F3"/>
-          </a:solidFill>
-          <a:ln w="12700">
-            <a:solidFill>
-              <a:srgbClr val="DDE8F3"/>
-            </a:solidFill>
-            <a:prstDash val="solid"/>
-          </a:ln>
-        </p:spPr>
-      </p:sp>
-      <p:sp>
-        <p:nvSpPr>
-          <p:cNvPr id="6" name="Shape 4"/>
-          <p:cNvSpPr/>
-          <p:nvPr/>
-        </p:nvSpPr>
-        <p:spPr>
-          <a:xfrm>
-            <a:off x="731520" y="1828800"/>
-            <a:ext cx="548640" cy="548640"/>
-          </a:xfrm>
-          <a:prstGeom prst="ellipse">
-            <a:avLst/>
-          </a:prstGeom>
-          <a:solidFill>
-            <a:srgbClr val="4F7CAC"/>
-          </a:solidFill>
-          <a:ln w="12700">
-            <a:solidFill>
-              <a:srgbClr val="4F7CAC"/>
-            </a:solidFill>
-            <a:prstDash val="solid"/>
-          </a:ln>
-        </p:spPr>
-      </p:sp>
-      <p:pic>
-        <p:nvPicPr>
-          <p:cNvPr id="7" name="Image 0" descr="preencoded.png">    </p:cNvPr>
-          <p:cNvPicPr>
-            <a:picLocks noChangeAspect="1"/>
-          </p:cNvPicPr>
-          <p:nvPr/>
-        </p:nvPicPr>
-        <p:blipFill>
-          <a:blip r:embed="rId1"/>
-          <a:stretch>
-            <a:fillRect/>
-          </a:stretch>
-        </p:blipFill>
-        <p:spPr>
-          <a:xfrm>
-            <a:off x="879653" y="1976933"/>
-            <a:ext cx="252374" cy="252374"/>
-          </a:xfrm>
-          <a:prstGeom prst="rect">
-            <a:avLst/>
-          </a:prstGeom>
-        </p:spPr>
-      </p:pic>
-      <p:sp>
-        <p:nvSpPr>
-          <p:cNvPr id="8" name="Text 5"/>
-          <p:cNvSpPr txBox="1"/>
-          <p:nvPr/>
-        </p:nvSpPr>
-        <p:spPr>
-          <a:xfrm>
-            <a:off x="731520" y="2514600"/>
-            <a:ext cx="1508760" cy="548640"/>
-          </a:xfrm>
-          <a:prstGeom prst="rect">
-            <a:avLst/>
-          </a:prstGeom>
-          <a:noFill/>
-          <a:ln/>
-        </p:spPr>
-        <p:txBody>
-          <a:bodyPr wrap="square" lIns="0" tIns="0" rIns="0" bIns="0" rtlCol="0" anchor="t"/>
-          <a:lstStyle/>
-          <a:p>
-            <a:pPr indent="0" marL="0">
-              <a:buNone/>
-            </a:pPr>
-            <a:r>
-              <a:rPr lang="en-US" sz="1600" b="1" dirty="0">
-                <a:solidFill>
-                  <a:srgbClr val="2F3E4E"/>
-                </a:solidFill>
-                <a:latin typeface="Calibri" pitchFamily="34" charset="0"/>
-                <a:ea typeface="Calibri" pitchFamily="34" charset="-122"/>
-                <a:cs typeface="Calibri" pitchFamily="34" charset="-120"/>
-              </a:rPr>
-              <a:t>9 · Ángulos</a:t>
-            </a:r>
-            <a:endParaRPr lang="en-US" sz="1600" dirty="0"/>
-          </a:p>
-        </p:txBody>
-      </p:sp>
-      <p:sp>
-        <p:nvSpPr>
-          <p:cNvPr id="9" name="Text 6"/>
-          <p:cNvSpPr txBox="1"/>
-          <p:nvPr/>
-        </p:nvSpPr>
-        <p:spPr>
-          <a:xfrm>
-            <a:off x="731520" y="3108960"/>
-            <a:ext cx="1508760" cy="868680"/>
-          </a:xfrm>
-          <a:prstGeom prst="rect">
-            <a:avLst/>
-          </a:prstGeom>
-          <a:noFill/>
-          <a:ln/>
-        </p:spPr>
-        <p:txBody>
-          <a:bodyPr wrap="square" lIns="0" tIns="0" rIns="0" bIns="0" rtlCol="0" anchor="t"/>
-          <a:lstStyle/>
-          <a:p>
-            <a:pPr indent="0" marL="0">
-              <a:buNone/>
-            </a:pPr>
-            <a:r>
-              <a:rPr lang="en-US" sz="1300" dirty="0">
-                <a:solidFill>
-                  <a:srgbClr val="2F3E4E"/>
-                </a:solidFill>
-                <a:latin typeface="Calibri" pitchFamily="34" charset="0"/>
-                <a:ea typeface="Calibri" pitchFamily="34" charset="-122"/>
-                <a:cs typeface="Calibri" pitchFamily="34" charset="-120"/>
-              </a:rPr>
-              <a:t>Ángulos, triángulos y polígonos.</a:t>
-            </a:r>
-            <a:endParaRPr lang="en-US" sz="1300" dirty="0"/>
-          </a:p>
-        </p:txBody>
-      </p:sp>
-      <p:sp>
-        <p:nvSpPr>
-          <p:cNvPr id="10" name="Shape 7"/>
-          <p:cNvSpPr/>
-          <p:nvPr/>
-        </p:nvSpPr>
-        <p:spPr>
-          <a:xfrm>
-            <a:off x="2606040" y="1645920"/>
-            <a:ext cx="1874520" cy="2377440"/>
-          </a:xfrm>
-          <a:prstGeom prst="roundRect">
-            <a:avLst>
-              <a:gd name="adj" fmla="val 5854"/>
-            </a:avLst>
-          </a:prstGeom>
-          <a:solidFill>
-            <a:srgbClr val="E1F0E7"/>
-          </a:solidFill>
-          <a:ln w="12700">
-            <a:solidFill>
-              <a:srgbClr val="E1F0E7"/>
-            </a:solidFill>
-            <a:prstDash val="solid"/>
-          </a:ln>
-        </p:spPr>
-      </p:sp>
-      <p:sp>
-        <p:nvSpPr>
-          <p:cNvPr id="11" name="Shape 8"/>
-          <p:cNvSpPr/>
-          <p:nvPr/>
-        </p:nvSpPr>
-        <p:spPr>
-          <a:xfrm>
-            <a:off x="2788920" y="1828800"/>
-            <a:ext cx="548640" cy="548640"/>
-          </a:xfrm>
-          <a:prstGeom prst="ellipse">
-            <a:avLst/>
-          </a:prstGeom>
-          <a:solidFill>
-            <a:srgbClr val="6FA287"/>
-          </a:solidFill>
-          <a:ln w="12700">
-            <a:solidFill>
-              <a:srgbClr val="6FA287"/>
-            </a:solidFill>
-            <a:prstDash val="solid"/>
-          </a:ln>
-        </p:spPr>
-      </p:sp>
-      <p:pic>
-        <p:nvPicPr>
-          <p:cNvPr id="12" name="Image 1" descr="preencoded.png">    </p:cNvPr>
-          <p:cNvPicPr>
-            <a:picLocks noChangeAspect="1"/>
-          </p:cNvPicPr>
-          <p:nvPr/>
-        </p:nvPicPr>
-        <p:blipFill>
-          <a:blip r:embed="rId2"/>
-          <a:stretch>
-            <a:fillRect/>
-          </a:stretch>
-        </p:blipFill>
-        <p:spPr>
-          <a:xfrm>
-            <a:off x="2937053" y="1976933"/>
-            <a:ext cx="252374" cy="252374"/>
-          </a:xfrm>
-          <a:prstGeom prst="rect">
-            <a:avLst/>
-          </a:prstGeom>
-        </p:spPr>
-      </p:pic>
-      <p:sp>
-        <p:nvSpPr>
-          <p:cNvPr id="13" name="Text 9"/>
-          <p:cNvSpPr txBox="1"/>
-          <p:nvPr/>
-        </p:nvSpPr>
-        <p:spPr>
-          <a:xfrm>
-            <a:off x="2788920" y="2514600"/>
-            <a:ext cx="1508760" cy="548640"/>
-          </a:xfrm>
-          <a:prstGeom prst="rect">
-            <a:avLst/>
-          </a:prstGeom>
-          <a:noFill/>
-          <a:ln/>
-        </p:spPr>
-        <p:txBody>
-          <a:bodyPr wrap="square" lIns="0" tIns="0" rIns="0" bIns="0" rtlCol="0" anchor="t"/>
-          <a:lstStyle/>
-          <a:p>
-            <a:pPr indent="0" marL="0">
-              <a:buNone/>
-            </a:pPr>
-            <a:r>
-              <a:rPr lang="en-US" sz="1600" b="1" dirty="0">
-                <a:solidFill>
-                  <a:srgbClr val="2F3E4E"/>
-                </a:solidFill>
-                <a:latin typeface="Calibri" pitchFamily="34" charset="0"/>
-                <a:ea typeface="Calibri" pitchFamily="34" charset="-122"/>
-                <a:cs typeface="Calibri" pitchFamily="34" charset="-120"/>
-              </a:rPr>
-              <a:t>10 · Pitágoras</a:t>
-            </a:r>
-            <a:endParaRPr lang="en-US" sz="1600" dirty="0"/>
-          </a:p>
-        </p:txBody>
-      </p:sp>
-      <p:sp>
-        <p:nvSpPr>
-          <p:cNvPr id="14" name="Text 10"/>
-          <p:cNvSpPr txBox="1"/>
-          <p:nvPr/>
-        </p:nvSpPr>
-        <p:spPr>
-          <a:xfrm>
-            <a:off x="2788920" y="3108960"/>
-            <a:ext cx="1508760" cy="868680"/>
-          </a:xfrm>
-          <a:prstGeom prst="rect">
-            <a:avLst/>
-          </a:prstGeom>
-          <a:noFill/>
-          <a:ln/>
-        </p:spPr>
-        <p:txBody>
-          <a:bodyPr wrap="square" lIns="0" tIns="0" rIns="0" bIns="0" rtlCol="0" anchor="t"/>
-          <a:lstStyle/>
-          <a:p>
-            <a:pPr indent="0" marL="0">
-              <a:buNone/>
-            </a:pPr>
-            <a:r>
-              <a:rPr lang="en-US" sz="1300" dirty="0">
-                <a:solidFill>
-                  <a:srgbClr val="2F3E4E"/>
-                </a:solidFill>
-                <a:latin typeface="Calibri" pitchFamily="34" charset="0"/>
-                <a:ea typeface="Calibri" pitchFamily="34" charset="-122"/>
-                <a:cs typeface="Calibri" pitchFamily="34" charset="-120"/>
-              </a:rPr>
-              <a:t>Lados de un triángulo rectángulo y distancias.</a:t>
-            </a:r>
-            <a:endParaRPr lang="en-US" sz="1300" dirty="0"/>
-          </a:p>
-        </p:txBody>
-      </p:sp>
-      <p:sp>
-        <p:nvSpPr>
-          <p:cNvPr id="15" name="Shape 11"/>
-          <p:cNvSpPr/>
-          <p:nvPr/>
-        </p:nvSpPr>
-        <p:spPr>
-          <a:xfrm>
-            <a:off x="4663440" y="1645920"/>
-            <a:ext cx="1874520" cy="2377440"/>
-          </a:xfrm>
-          <a:prstGeom prst="roundRect">
-            <a:avLst>
-              <a:gd name="adj" fmla="val 5854"/>
-            </a:avLst>
-          </a:prstGeom>
-          <a:solidFill>
-            <a:srgbClr val="FBEADC"/>
-          </a:solidFill>
-          <a:ln w="12700">
-            <a:solidFill>
-              <a:srgbClr val="FBEADC"/>
-            </a:solidFill>
-            <a:prstDash val="solid"/>
-          </a:ln>
-        </p:spPr>
-      </p:sp>
-      <p:sp>
-        <p:nvSpPr>
-          <p:cNvPr id="16" name="Shape 12"/>
-          <p:cNvSpPr/>
-          <p:nvPr/>
-        </p:nvSpPr>
-        <p:spPr>
-          <a:xfrm>
-            <a:off x="4846320" y="1828800"/>
-            <a:ext cx="548640" cy="548640"/>
-          </a:xfrm>
-          <a:prstGeom prst="ellipse">
-            <a:avLst/>
-          </a:prstGeom>
-          <a:solidFill>
-            <a:srgbClr val="E39B6B"/>
-          </a:solidFill>
-          <a:ln w="12700">
-            <a:solidFill>
-              <a:srgbClr val="E39B6B"/>
-            </a:solidFill>
-            <a:prstDash val="solid"/>
-          </a:ln>
-        </p:spPr>
-      </p:sp>
-      <p:pic>
-        <p:nvPicPr>
-          <p:cNvPr id="17" name="Image 2" descr="preencoded.png">    </p:cNvPr>
-          <p:cNvPicPr>
-            <a:picLocks noChangeAspect="1"/>
-          </p:cNvPicPr>
-          <p:nvPr/>
-        </p:nvPicPr>
-        <p:blipFill>
-          <a:blip r:embed="rId3"/>
-          <a:stretch>
-            <a:fillRect/>
-          </a:stretch>
-        </p:blipFill>
-        <p:spPr>
-          <a:xfrm>
-            <a:off x="4994453" y="1976933"/>
-            <a:ext cx="252374" cy="252374"/>
-          </a:xfrm>
-          <a:prstGeom prst="rect">
-            <a:avLst/>
-          </a:prstGeom>
-        </p:spPr>
-      </p:pic>
-      <p:sp>
-        <p:nvSpPr>
-          <p:cNvPr id="18" name="Text 13"/>
-          <p:cNvSpPr txBox="1"/>
-          <p:nvPr/>
-        </p:nvSpPr>
-        <p:spPr>
-          <a:xfrm>
-            <a:off x="4846320" y="2514600"/>
-            <a:ext cx="1508760" cy="548640"/>
-          </a:xfrm>
-          <a:prstGeom prst="rect">
-            <a:avLst/>
-          </a:prstGeom>
-          <a:noFill/>
-          <a:ln/>
-        </p:spPr>
-        <p:txBody>
-          <a:bodyPr wrap="square" lIns="0" tIns="0" rIns="0" bIns="0" rtlCol="0" anchor="t"/>
-          <a:lstStyle/>
-          <a:p>
-            <a:pPr indent="0" marL="0">
-              <a:buNone/>
-            </a:pPr>
-            <a:r>
-              <a:rPr lang="en-US" sz="1600" b="1" dirty="0">
-                <a:solidFill>
-                  <a:srgbClr val="2F3E4E"/>
-                </a:solidFill>
-                <a:latin typeface="Calibri" pitchFamily="34" charset="0"/>
-                <a:ea typeface="Calibri" pitchFamily="34" charset="-122"/>
-                <a:cs typeface="Calibri" pitchFamily="34" charset="-120"/>
-              </a:rPr>
-              <a:t>11 · Trigonometría</a:t>
-            </a:r>
-            <a:endParaRPr lang="en-US" sz="1600" dirty="0"/>
-          </a:p>
-        </p:txBody>
-      </p:sp>
-      <p:sp>
-        <p:nvSpPr>
-          <p:cNvPr id="19" name="Text 14"/>
-          <p:cNvSpPr txBox="1"/>
-          <p:nvPr/>
-        </p:nvSpPr>
-        <p:spPr>
-          <a:xfrm>
-            <a:off x="4846320" y="3108960"/>
-            <a:ext cx="1508760" cy="868680"/>
-          </a:xfrm>
-          <a:prstGeom prst="rect">
-            <a:avLst/>
-          </a:prstGeom>
-          <a:noFill/>
-          <a:ln/>
-        </p:spPr>
-        <p:txBody>
-          <a:bodyPr wrap="square" lIns="0" tIns="0" rIns="0" bIns="0" rtlCol="0" anchor="t"/>
-          <a:lstStyle/>
-          <a:p>
-            <a:pPr indent="0" marL="0">
-              <a:buNone/>
-            </a:pPr>
-            <a:r>
-              <a:rPr lang="en-US" sz="1300" dirty="0">
-                <a:solidFill>
-                  <a:srgbClr val="2F3E4E"/>
-                </a:solidFill>
-                <a:latin typeface="Calibri" pitchFamily="34" charset="0"/>
-                <a:ea typeface="Calibri" pitchFamily="34" charset="-122"/>
-                <a:cs typeface="Calibri" pitchFamily="34" charset="-120"/>
-              </a:rPr>
-              <a:t>Razones entre lados y ángulos.</a:t>
-            </a:r>
-            <a:endParaRPr lang="en-US" sz="1300" dirty="0"/>
-          </a:p>
-        </p:txBody>
-      </p:sp>
-      <p:sp>
-        <p:nvSpPr>
-          <p:cNvPr id="20" name="Shape 15"/>
-          <p:cNvSpPr/>
-          <p:nvPr/>
-        </p:nvSpPr>
-        <p:spPr>
-          <a:xfrm>
-            <a:off x="6720840" y="1645920"/>
-            <a:ext cx="1874520" cy="2377440"/>
-          </a:xfrm>
-          <a:prstGeom prst="roundRect">
-            <a:avLst>
-              <a:gd name="adj" fmla="val 5854"/>
-            </a:avLst>
-          </a:prstGeom>
-          <a:solidFill>
-            <a:srgbClr val="ECE8F6"/>
-          </a:solidFill>
-          <a:ln w="12700">
-            <a:solidFill>
-              <a:srgbClr val="ECE8F6"/>
-            </a:solidFill>
-            <a:prstDash val="solid"/>
-          </a:ln>
-        </p:spPr>
-      </p:sp>
-      <p:sp>
-        <p:nvSpPr>
-          <p:cNvPr id="21" name="Shape 16"/>
-          <p:cNvSpPr/>
-          <p:nvPr/>
-        </p:nvSpPr>
-        <p:spPr>
-          <a:xfrm>
-            <a:off x="6903720" y="1828800"/>
-            <a:ext cx="548640" cy="548640"/>
-          </a:xfrm>
-          <a:prstGeom prst="ellipse">
-            <a:avLst/>
-          </a:prstGeom>
-          <a:solidFill>
-            <a:srgbClr val="8E7FBF"/>
-          </a:solidFill>
-          <a:ln w="12700">
-            <a:solidFill>
-              <a:srgbClr val="8E7FBF"/>
-            </a:solidFill>
-            <a:prstDash val="solid"/>
-          </a:ln>
-        </p:spPr>
-      </p:sp>
-      <p:pic>
-        <p:nvPicPr>
-          <p:cNvPr id="22" name="Image 3" descr="preencoded.png">    </p:cNvPr>
-          <p:cNvPicPr>
-            <a:picLocks noChangeAspect="1"/>
-          </p:cNvPicPr>
-          <p:nvPr/>
-        </p:nvPicPr>
-        <p:blipFill>
-          <a:blip r:embed="rId4"/>
-          <a:stretch>
-            <a:fillRect/>
-          </a:stretch>
-        </p:blipFill>
-        <p:spPr>
-          <a:xfrm>
-            <a:off x="7051853" y="1976933"/>
-            <a:ext cx="252374" cy="252374"/>
-          </a:xfrm>
-          <a:prstGeom prst="rect">
-            <a:avLst/>
-          </a:prstGeom>
-        </p:spPr>
-      </p:pic>
-      <p:sp>
-        <p:nvSpPr>
-          <p:cNvPr id="23" name="Text 17"/>
-          <p:cNvSpPr txBox="1"/>
-          <p:nvPr/>
-        </p:nvSpPr>
-        <p:spPr>
-          <a:xfrm>
-            <a:off x="6903720" y="2514600"/>
-            <a:ext cx="1508760" cy="548640"/>
-          </a:xfrm>
-          <a:prstGeom prst="rect">
-            <a:avLst/>
-          </a:prstGeom>
-          <a:noFill/>
-          <a:ln/>
-        </p:spPr>
-        <p:txBody>
-          <a:bodyPr wrap="square" lIns="0" tIns="0" rIns="0" bIns="0" rtlCol="0" anchor="t"/>
-          <a:lstStyle/>
-          <a:p>
-            <a:pPr indent="0" marL="0">
-              <a:buNone/>
-            </a:pPr>
-            <a:r>
-              <a:rPr lang="en-US" sz="1600" b="1" dirty="0">
-                <a:solidFill>
-                  <a:srgbClr val="2F3E4E"/>
-                </a:solidFill>
-                <a:latin typeface="Calibri" pitchFamily="34" charset="0"/>
-                <a:ea typeface="Calibri" pitchFamily="34" charset="-122"/>
-                <a:cs typeface="Calibri" pitchFamily="34" charset="-120"/>
-              </a:rPr>
-              <a:t>12 · Patrones</a:t>
-            </a:r>
-            <a:endParaRPr lang="en-US" sz="1600" dirty="0"/>
-          </a:p>
-        </p:txBody>
-      </p:sp>
-      <p:sp>
-        <p:nvSpPr>
-          <p:cNvPr id="24" name="Text 18"/>
-          <p:cNvSpPr txBox="1"/>
-          <p:nvPr/>
-        </p:nvSpPr>
-        <p:spPr>
-          <a:xfrm>
-            <a:off x="6903720" y="3108960"/>
-            <a:ext cx="1508760" cy="868680"/>
-          </a:xfrm>
-          <a:prstGeom prst="rect">
-            <a:avLst/>
-          </a:prstGeom>
-          <a:noFill/>
-          <a:ln/>
-        </p:spPr>
-        <p:txBody>
-          <a:bodyPr wrap="square" lIns="0" tIns="0" rIns="0" bIns="0" rtlCol="0" anchor="t"/>
-          <a:lstStyle/>
-          <a:p>
-            <a:pPr indent="0" marL="0">
-              <a:buNone/>
-            </a:pPr>
-            <a:r>
-              <a:rPr lang="en-US" sz="1300" dirty="0">
-                <a:solidFill>
-                  <a:srgbClr val="2F3E4E"/>
-                </a:solidFill>
-                <a:latin typeface="Calibri" pitchFamily="34" charset="0"/>
-                <a:ea typeface="Calibri" pitchFamily="34" charset="-122"/>
-                <a:cs typeface="Calibri" pitchFamily="34" charset="-120"/>
-              </a:rPr>
-              <a:t>Progresiones y sumas acumuladas.</a:t>
-            </a:r>
-            <a:endParaRPr lang="en-US" sz="1300" dirty="0"/>
-          </a:p>
-        </p:txBody>
-      </p:sp>
     </p:spTree>
   </p:cSld>
   <p:clrMapOvr>
